--- a/decks/Heme_01_CBC-and-Peripheral-Smear.pptx
+++ b/decks/Heme_01_CBC-and-Peripheral-Smear.pptx
@@ -25,9 +25,13 @@
     <p:sldId id="273" r:id="rId19"/>
     <p:sldId id="274" r:id="rId20"/>
     <p:sldId id="275" r:id="rId21"/>
+    <p:sldId id="284" r:id="rId35"/>
     <p:sldId id="276" r:id="rId22"/>
+    <p:sldId id="283" r:id="rId34"/>
     <p:sldId id="277" r:id="rId23"/>
+    <p:sldId id="282" r:id="rId33"/>
     <p:sldId id="278" r:id="rId24"/>
+    <p:sldId id="281" r:id="rId32"/>
     <p:sldId id="279" r:id="rId25"/>
     <p:sldId id="280" r:id="rId26"/>
   </p:sldIdLst>
@@ -3032,6 +3036,10 @@
           </a:solidFill>
           <a:ln/>
         </p:spPr>
+        <p:txBody>
+          <a:bodyPr/>
+          <a:p/>
+        </p:txBody>
       </p:sp>
       <p:sp>
         <p:nvSpPr>
@@ -3054,6 +3062,10 @@
           </a:solidFill>
           <a:ln/>
         </p:spPr>
+        <p:txBody>
+          <a:bodyPr/>
+          <a:p/>
+        </p:txBody>
       </p:sp>
       <p:sp>
         <p:nvSpPr>
@@ -3076,6 +3088,10 @@
           </a:solidFill>
           <a:ln/>
         </p:spPr>
+        <p:txBody>
+          <a:bodyPr/>
+          <a:p/>
+        </p:txBody>
       </p:sp>
       <p:sp>
         <p:nvSpPr>
@@ -3098,6 +3114,10 @@
           </a:solidFill>
           <a:ln/>
         </p:spPr>
+        <p:txBody>
+          <a:bodyPr/>
+          <a:p/>
+        </p:txBody>
       </p:sp>
       <p:sp>
         <p:nvSpPr>
@@ -3519,6 +3539,10 @@
             </a:outerShdw>
           </a:effectLst>
         </p:spPr>
+        <p:txBody>
+          <a:bodyPr/>
+          <a:p/>
+        </p:txBody>
       </p:sp>
       <p:pic>
         <p:nvPicPr>
@@ -5078,6 +5102,10 @@
             </a:outerShdw>
           </a:effectLst>
         </p:spPr>
+        <p:txBody>
+          <a:bodyPr/>
+          <a:p/>
+        </p:txBody>
       </p:sp>
       <p:sp>
         <p:nvSpPr>
@@ -5252,6 +5280,10 @@
             </a:outerShdw>
           </a:effectLst>
         </p:spPr>
+        <p:txBody>
+          <a:bodyPr/>
+          <a:p/>
+        </p:txBody>
       </p:sp>
       <p:sp>
         <p:nvSpPr>
@@ -5557,6 +5589,10 @@
           </a:solidFill>
           <a:ln/>
         </p:spPr>
+        <p:txBody>
+          <a:bodyPr/>
+          <a:p/>
+        </p:txBody>
       </p:sp>
       <p:sp>
         <p:nvSpPr>
@@ -5579,6 +5615,10 @@
           </a:solidFill>
           <a:ln/>
         </p:spPr>
+        <p:txBody>
+          <a:bodyPr/>
+          <a:p/>
+        </p:txBody>
       </p:sp>
       <p:sp>
         <p:nvSpPr>
@@ -5835,6 +5875,10 @@
             </a:outerShdw>
           </a:effectLst>
         </p:spPr>
+        <p:txBody>
+          <a:bodyPr/>
+          <a:p/>
+        </p:txBody>
       </p:sp>
       <p:sp>
         <p:nvSpPr>
@@ -5945,6 +5989,10 @@
             </a:outerShdw>
           </a:effectLst>
         </p:spPr>
+        <p:txBody>
+          <a:bodyPr/>
+          <a:p/>
+        </p:txBody>
       </p:sp>
       <p:sp>
         <p:nvSpPr>
@@ -6374,6 +6422,10 @@
             </a:outerShdw>
           </a:effectLst>
         </p:spPr>
+        <p:txBody>
+          <a:bodyPr/>
+          <a:p/>
+        </p:txBody>
       </p:sp>
       <p:sp>
         <p:nvSpPr>
@@ -6700,6 +6752,10 @@
             </a:outerShdw>
           </a:effectLst>
         </p:spPr>
+        <p:txBody>
+          <a:bodyPr/>
+          <a:p/>
+        </p:txBody>
       </p:sp>
       <p:sp>
         <p:nvSpPr>
@@ -6810,6 +6866,10 @@
             </a:outerShdw>
           </a:effectLst>
         </p:spPr>
+        <p:txBody>
+          <a:bodyPr/>
+          <a:p/>
+        </p:txBody>
       </p:sp>
       <p:sp>
         <p:nvSpPr>
@@ -7239,6 +7299,10 @@
             </a:outerShdw>
           </a:effectLst>
         </p:spPr>
+        <p:txBody>
+          <a:bodyPr/>
+          <a:p/>
+        </p:txBody>
       </p:sp>
       <p:sp>
         <p:nvSpPr>
@@ -7565,6 +7629,10 @@
             </a:outerShdw>
           </a:effectLst>
         </p:spPr>
+        <p:txBody>
+          <a:bodyPr/>
+          <a:p/>
+        </p:txBody>
       </p:sp>
       <p:sp>
         <p:nvSpPr>
@@ -7675,6 +7743,10 @@
             </a:outerShdw>
           </a:effectLst>
         </p:spPr>
+        <p:txBody>
+          <a:bodyPr/>
+          <a:p/>
+        </p:txBody>
       </p:sp>
       <p:sp>
         <p:nvSpPr>
@@ -8104,6 +8176,10 @@
             </a:outerShdw>
           </a:effectLst>
         </p:spPr>
+        <p:txBody>
+          <a:bodyPr/>
+          <a:p/>
+        </p:txBody>
       </p:sp>
       <p:sp>
         <p:nvSpPr>
@@ -8430,6 +8506,10 @@
             </a:outerShdw>
           </a:effectLst>
         </p:spPr>
+        <p:txBody>
+          <a:bodyPr/>
+          <a:p/>
+        </p:txBody>
       </p:sp>
       <p:sp>
         <p:nvSpPr>
@@ -8537,6 +8617,10 @@
             </a:outerShdw>
           </a:effectLst>
         </p:spPr>
+        <p:txBody>
+          <a:bodyPr/>
+          <a:p/>
+        </p:txBody>
       </p:sp>
       <p:sp>
         <p:nvSpPr>
@@ -8644,6 +8728,10 @@
             </a:outerShdw>
           </a:effectLst>
         </p:spPr>
+        <p:txBody>
+          <a:bodyPr/>
+          <a:p/>
+        </p:txBody>
       </p:sp>
       <p:sp>
         <p:nvSpPr>
@@ -8751,6 +8839,10 @@
             </a:outerShdw>
           </a:effectLst>
         </p:spPr>
+        <p:txBody>
+          <a:bodyPr/>
+          <a:p/>
+        </p:txBody>
       </p:sp>
       <p:sp>
         <p:nvSpPr>
@@ -9143,9 +9235,9 @@
               <a:buNone/>
             </a:pPr>
             <a:r>
-              <a:rPr lang="en-US" sz="1350" b="1" dirty="0">
-                <a:solidFill>
-                  <a:srgbClr val="8E1622"/>
+              <a:rPr lang="en-US" sz="1350" b="0" dirty="0">
+                <a:solidFill>
+                  <a:srgbClr val="33444F"/>
                 </a:solidFill>
                 <a:latin typeface="Calibri" pitchFamily="34" charset="0"/>
                 <a:ea typeface="Calibri" pitchFamily="34" charset="-122"/>
@@ -9214,130 +9306,6 @@
               <a:t>E. Target cells only</a:t>
             </a:r>
             <a:endParaRPr lang="en-US" sz="1350" dirty="0"/>
-          </a:p>
-        </p:txBody>
-      </p:sp>
-      <p:sp>
-        <p:nvSpPr>
-          <p:cNvPr id="6" name="Shape 4"/>
-          <p:cNvSpPr/>
-          <p:nvPr/>
-        </p:nvSpPr>
-        <p:spPr>
-          <a:xfrm>
-            <a:off x="7201632" y="2395728"/>
-            <a:ext cx="4423136" cy="3246120"/>
-          </a:xfrm>
-          <a:prstGeom prst="roundRect">
-            <a:avLst>
-              <a:gd name="adj" fmla="val 2535"/>
-            </a:avLst>
-          </a:prstGeom>
-          <a:solidFill>
-            <a:srgbClr val="FBEAEC"/>
-          </a:solidFill>
-          <a:ln/>
-          <a:effectLst>
-            <a:outerShdw sx="100000" sy="100000" kx="0" ky="0" algn="bl" rotWithShape="0" blurRad="88900" dist="25400" dir="5400000">
-              <a:srgbClr val="22303C">
-                <a:alpha val="12000"/>
-              </a:srgbClr>
-            </a:outerShdw>
-          </a:effectLst>
-        </p:spPr>
-      </p:sp>
-      <p:sp>
-        <p:nvSpPr>
-          <p:cNvPr id="7" name="Text 5"/>
-          <p:cNvSpPr/>
-          <p:nvPr/>
-        </p:nvSpPr>
-        <p:spPr>
-          <a:xfrm>
-            <a:off x="7439376" y="2578608"/>
-            <a:ext cx="3965936" cy="457200"/>
-          </a:xfrm>
-          <a:prstGeom prst="rect">
-            <a:avLst/>
-          </a:prstGeom>
-          <a:noFill/>
-          <a:ln/>
-        </p:spPr>
-        <p:txBody>
-          <a:bodyPr wrap="square" lIns="0" tIns="0" rIns="0" bIns="0" rtlCol="0" anchor="ctr"/>
-          <a:lstStyle/>
-          <a:p>
-            <a:pPr indent="0" marL="0">
-              <a:buNone/>
-            </a:pPr>
-            <a:r>
-              <a:rPr lang="en-US" sz="1500" b="1" dirty="0">
-                <a:solidFill>
-                  <a:srgbClr val="C62133"/>
-                </a:solidFill>
-                <a:latin typeface="Calibri" pitchFamily="34" charset="0"/>
-                <a:ea typeface="Calibri" pitchFamily="34" charset="-122"/>
-                <a:cs typeface="Calibri" pitchFamily="34" charset="-120"/>
-              </a:rPr>
-              <a:t>ANSWER  </a:t>
-            </a:r>
-            <a:pPr indent="0" marL="0">
-              <a:buNone/>
-            </a:pPr>
-            <a:r>
-              <a:rPr lang="en-US" sz="1500" b="1" dirty="0">
-                <a:solidFill>
-                  <a:srgbClr val="1B2A38"/>
-                </a:solidFill>
-                <a:latin typeface="Calibri" pitchFamily="34" charset="0"/>
-                <a:ea typeface="Calibri" pitchFamily="34" charset="-122"/>
-                <a:cs typeface="Calibri" pitchFamily="34" charset="-120"/>
-              </a:rPr>
-              <a:t>B — Low MCV with high RDW</a:t>
-            </a:r>
-            <a:endParaRPr lang="en-US" sz="1500" dirty="0"/>
-          </a:p>
-        </p:txBody>
-      </p:sp>
-      <p:sp>
-        <p:nvSpPr>
-          <p:cNvPr id="8" name="Text 6"/>
-          <p:cNvSpPr/>
-          <p:nvPr/>
-        </p:nvSpPr>
-        <p:spPr>
-          <a:xfrm>
-            <a:off x="7439376" y="3127248"/>
-            <a:ext cx="3947648" cy="2377440"/>
-          </a:xfrm>
-          <a:prstGeom prst="rect">
-            <a:avLst/>
-          </a:prstGeom>
-          <a:noFill/>
-          <a:ln/>
-        </p:spPr>
-        <p:txBody>
-          <a:bodyPr wrap="square" lIns="0" tIns="0" rIns="0" bIns="0" rtlCol="0" anchor="t"/>
-          <a:lstStyle/>
-          <a:p>
-            <a:pPr algn="l" indent="0" marL="0">
-              <a:lnSpc>
-                <a:spcPct val="108000"/>
-              </a:lnSpc>
-              <a:buNone/>
-            </a:pPr>
-            <a:r>
-              <a:rPr lang="en-US" sz="1250" dirty="0">
-                <a:solidFill>
-                  <a:srgbClr val="33444F"/>
-                </a:solidFill>
-                <a:latin typeface="Calibri" pitchFamily="34" charset="0"/>
-                <a:ea typeface="Calibri" pitchFamily="34" charset="-122"/>
-                <a:cs typeface="Calibri" pitchFamily="34" charset="-120"/>
-              </a:rPr>
-              <a:t>Iron deficiency typically shows microcytosis with elevated RDW (anisocytosis); thalassemia trait often has a more uniform low MCV with normal RDW.</a:t>
-            </a:r>
-            <a:endParaRPr lang="en-US" sz="1250" dirty="0"/>
           </a:p>
         </p:txBody>
       </p:sp>
@@ -9647,9 +9615,9 @@
               <a:buNone/>
             </a:pPr>
             <a:r>
-              <a:rPr lang="en-US" sz="1350" b="1" dirty="0">
-                <a:solidFill>
-                  <a:srgbClr val="8E1622"/>
+              <a:rPr lang="en-US" sz="1350" b="0" dirty="0">
+                <a:solidFill>
+                  <a:srgbClr val="33444F"/>
                 </a:solidFill>
                 <a:latin typeface="Calibri" pitchFamily="34" charset="0"/>
                 <a:ea typeface="Calibri" pitchFamily="34" charset="-122"/>
@@ -9718,130 +9686,6 @@
               <a:t>E. Myelofibrosis</a:t>
             </a:r>
             <a:endParaRPr lang="en-US" sz="1350" dirty="0"/>
-          </a:p>
-        </p:txBody>
-      </p:sp>
-      <p:sp>
-        <p:nvSpPr>
-          <p:cNvPr id="6" name="Shape 4"/>
-          <p:cNvSpPr/>
-          <p:nvPr/>
-        </p:nvSpPr>
-        <p:spPr>
-          <a:xfrm>
-            <a:off x="7201632" y="2395728"/>
-            <a:ext cx="4423136" cy="3246120"/>
-          </a:xfrm>
-          <a:prstGeom prst="roundRect">
-            <a:avLst>
-              <a:gd name="adj" fmla="val 2535"/>
-            </a:avLst>
-          </a:prstGeom>
-          <a:solidFill>
-            <a:srgbClr val="FBEAEC"/>
-          </a:solidFill>
-          <a:ln/>
-          <a:effectLst>
-            <a:outerShdw sx="100000" sy="100000" kx="0" ky="0" algn="bl" rotWithShape="0" blurRad="88900" dist="25400" dir="5400000">
-              <a:srgbClr val="22303C">
-                <a:alpha val="12000"/>
-              </a:srgbClr>
-            </a:outerShdw>
-          </a:effectLst>
-        </p:spPr>
-      </p:sp>
-      <p:sp>
-        <p:nvSpPr>
-          <p:cNvPr id="7" name="Text 5"/>
-          <p:cNvSpPr/>
-          <p:nvPr/>
-        </p:nvSpPr>
-        <p:spPr>
-          <a:xfrm>
-            <a:off x="7439376" y="2578608"/>
-            <a:ext cx="3965936" cy="457200"/>
-          </a:xfrm>
-          <a:prstGeom prst="rect">
-            <a:avLst/>
-          </a:prstGeom>
-          <a:noFill/>
-          <a:ln/>
-        </p:spPr>
-        <p:txBody>
-          <a:bodyPr wrap="square" lIns="0" tIns="0" rIns="0" bIns="0" rtlCol="0" anchor="ctr"/>
-          <a:lstStyle/>
-          <a:p>
-            <a:pPr indent="0" marL="0">
-              <a:buNone/>
-            </a:pPr>
-            <a:r>
-              <a:rPr lang="en-US" sz="1500" b="1" dirty="0">
-                <a:solidFill>
-                  <a:srgbClr val="C62133"/>
-                </a:solidFill>
-                <a:latin typeface="Calibri" pitchFamily="34" charset="0"/>
-                <a:ea typeface="Calibri" pitchFamily="34" charset="-122"/>
-                <a:cs typeface="Calibri" pitchFamily="34" charset="-120"/>
-              </a:rPr>
-              <a:t>ANSWER  </a:t>
-            </a:r>
-            <a:pPr indent="0" marL="0">
-              <a:buNone/>
-            </a:pPr>
-            <a:r>
-              <a:rPr lang="en-US" sz="1500" b="1" dirty="0">
-                <a:solidFill>
-                  <a:srgbClr val="1B2A38"/>
-                </a:solidFill>
-                <a:latin typeface="Calibri" pitchFamily="34" charset="0"/>
-                <a:ea typeface="Calibri" pitchFamily="34" charset="-122"/>
-                <a:cs typeface="Calibri" pitchFamily="34" charset="-120"/>
-              </a:rPr>
-              <a:t>B — An artifact</a:t>
-            </a:r>
-            <a:endParaRPr lang="en-US" sz="1500" dirty="0"/>
-          </a:p>
-        </p:txBody>
-      </p:sp>
-      <p:sp>
-        <p:nvSpPr>
-          <p:cNvPr id="8" name="Text 6"/>
-          <p:cNvSpPr/>
-          <p:nvPr/>
-        </p:nvSpPr>
-        <p:spPr>
-          <a:xfrm>
-            <a:off x="7439376" y="3127248"/>
-            <a:ext cx="3947648" cy="2377440"/>
-          </a:xfrm>
-          <a:prstGeom prst="rect">
-            <a:avLst/>
-          </a:prstGeom>
-          <a:noFill/>
-          <a:ln/>
-        </p:spPr>
-        <p:txBody>
-          <a:bodyPr wrap="square" lIns="0" tIns="0" rIns="0" bIns="0" rtlCol="0" anchor="t"/>
-          <a:lstStyle/>
-          <a:p>
-            <a:pPr algn="l" indent="0" marL="0">
-              <a:lnSpc>
-                <a:spcPct val="108000"/>
-              </a:lnSpc>
-              <a:buNone/>
-            </a:pPr>
-            <a:r>
-              <a:rPr lang="en-US" sz="1250" dirty="0">
-                <a:solidFill>
-                  <a:srgbClr val="33444F"/>
-                </a:solidFill>
-                <a:latin typeface="Calibri" pitchFamily="34" charset="0"/>
-                <a:ea typeface="Calibri" pitchFamily="34" charset="-122"/>
-                <a:cs typeface="Calibri" pitchFamily="34" charset="-120"/>
-              </a:rPr>
-              <a:t>Red cells cannot be truly hyperchromic; a very high MCHC indicates an artifact such as cold agglutinins or lipemia.</a:t>
-            </a:r>
-            <a:endParaRPr lang="en-US" sz="1250" dirty="0"/>
           </a:p>
         </p:txBody>
       </p:sp>
@@ -10151,9 +9995,9 @@
               <a:buNone/>
             </a:pPr>
             <a:r>
-              <a:rPr lang="en-US" sz="1350" b="1" dirty="0">
-                <a:solidFill>
-                  <a:srgbClr val="8E1622"/>
+              <a:rPr lang="en-US" sz="1350" b="0" dirty="0">
+                <a:solidFill>
+                  <a:srgbClr val="33444F"/>
                 </a:solidFill>
                 <a:latin typeface="Calibri" pitchFamily="34" charset="0"/>
                 <a:ea typeface="Calibri" pitchFamily="34" charset="-122"/>
@@ -10222,130 +10066,6 @@
               <a:t>E. Rouleaux</a:t>
             </a:r>
             <a:endParaRPr lang="en-US" sz="1350" dirty="0"/>
-          </a:p>
-        </p:txBody>
-      </p:sp>
-      <p:sp>
-        <p:nvSpPr>
-          <p:cNvPr id="6" name="Shape 4"/>
-          <p:cNvSpPr/>
-          <p:nvPr/>
-        </p:nvSpPr>
-        <p:spPr>
-          <a:xfrm>
-            <a:off x="7201632" y="2395728"/>
-            <a:ext cx="4423136" cy="3246120"/>
-          </a:xfrm>
-          <a:prstGeom prst="roundRect">
-            <a:avLst>
-              <a:gd name="adj" fmla="val 2535"/>
-            </a:avLst>
-          </a:prstGeom>
-          <a:solidFill>
-            <a:srgbClr val="FBEAEC"/>
-          </a:solidFill>
-          <a:ln/>
-          <a:effectLst>
-            <a:outerShdw sx="100000" sy="100000" kx="0" ky="0" algn="bl" rotWithShape="0" blurRad="88900" dist="25400" dir="5400000">
-              <a:srgbClr val="22303C">
-                <a:alpha val="12000"/>
-              </a:srgbClr>
-            </a:outerShdw>
-          </a:effectLst>
-        </p:spPr>
-      </p:sp>
-      <p:sp>
-        <p:nvSpPr>
-          <p:cNvPr id="7" name="Text 5"/>
-          <p:cNvSpPr/>
-          <p:nvPr/>
-        </p:nvSpPr>
-        <p:spPr>
-          <a:xfrm>
-            <a:off x="7439376" y="2578608"/>
-            <a:ext cx="3965936" cy="457200"/>
-          </a:xfrm>
-          <a:prstGeom prst="rect">
-            <a:avLst/>
-          </a:prstGeom>
-          <a:noFill/>
-          <a:ln/>
-        </p:spPr>
-        <p:txBody>
-          <a:bodyPr wrap="square" lIns="0" tIns="0" rIns="0" bIns="0" rtlCol="0" anchor="ctr"/>
-          <a:lstStyle/>
-          <a:p>
-            <a:pPr indent="0" marL="0">
-              <a:buNone/>
-            </a:pPr>
-            <a:r>
-              <a:rPr lang="en-US" sz="1500" b="1" dirty="0">
-                <a:solidFill>
-                  <a:srgbClr val="C62133"/>
-                </a:solidFill>
-                <a:latin typeface="Calibri" pitchFamily="34" charset="0"/>
-                <a:ea typeface="Calibri" pitchFamily="34" charset="-122"/>
-                <a:cs typeface="Calibri" pitchFamily="34" charset="-120"/>
-              </a:rPr>
-              <a:t>ANSWER  </a:t>
-            </a:r>
-            <a:pPr indent="0" marL="0">
-              <a:buNone/>
-            </a:pPr>
-            <a:r>
-              <a:rPr lang="en-US" sz="1500" b="1" dirty="0">
-                <a:solidFill>
-                  <a:srgbClr val="1B2A38"/>
-                </a:solidFill>
-                <a:latin typeface="Calibri" pitchFamily="34" charset="0"/>
-                <a:ea typeface="Calibri" pitchFamily="34" charset="-122"/>
-                <a:cs typeface="Calibri" pitchFamily="34" charset="-120"/>
-              </a:rPr>
-              <a:t>B — Microangiopathic hemolysis</a:t>
-            </a:r>
-            <a:endParaRPr lang="en-US" sz="1500" dirty="0"/>
-          </a:p>
-        </p:txBody>
-      </p:sp>
-      <p:sp>
-        <p:nvSpPr>
-          <p:cNvPr id="8" name="Text 6"/>
-          <p:cNvSpPr/>
-          <p:nvPr/>
-        </p:nvSpPr>
-        <p:spPr>
-          <a:xfrm>
-            <a:off x="7439376" y="3127248"/>
-            <a:ext cx="3947648" cy="2377440"/>
-          </a:xfrm>
-          <a:prstGeom prst="rect">
-            <a:avLst/>
-          </a:prstGeom>
-          <a:noFill/>
-          <a:ln/>
-        </p:spPr>
-        <p:txBody>
-          <a:bodyPr wrap="square" lIns="0" tIns="0" rIns="0" bIns="0" rtlCol="0" anchor="t"/>
-          <a:lstStyle/>
-          <a:p>
-            <a:pPr algn="l" indent="0" marL="0">
-              <a:lnSpc>
-                <a:spcPct val="108000"/>
-              </a:lnSpc>
-              <a:buNone/>
-            </a:pPr>
-            <a:r>
-              <a:rPr lang="en-US" sz="1250" dirty="0">
-                <a:solidFill>
-                  <a:srgbClr val="33444F"/>
-                </a:solidFill>
-                <a:latin typeface="Calibri" pitchFamily="34" charset="0"/>
-                <a:ea typeface="Calibri" pitchFamily="34" charset="-122"/>
-                <a:cs typeface="Calibri" pitchFamily="34" charset="-120"/>
-              </a:rPr>
-              <a:t>Fragmented red cells indicate mechanical/microangiopathic processes requiring urgent assessment.</a:t>
-            </a:r>
-            <a:endParaRPr lang="en-US" sz="1250" dirty="0"/>
           </a:p>
         </p:txBody>
       </p:sp>
@@ -10655,9 +10375,9 @@
               <a:buNone/>
             </a:pPr>
             <a:r>
-              <a:rPr lang="en-US" sz="1350" b="1" dirty="0">
-                <a:solidFill>
-                  <a:srgbClr val="8E1622"/>
+              <a:rPr lang="en-US" sz="1350" b="0" dirty="0">
+                <a:solidFill>
+                  <a:srgbClr val="33444F"/>
                 </a:solidFill>
                 <a:latin typeface="Calibri" pitchFamily="34" charset="0"/>
                 <a:ea typeface="Calibri" pitchFamily="34" charset="-122"/>
@@ -10726,130 +10446,6 @@
               <a:t>E. Ignoring it</a:t>
             </a:r>
             <a:endParaRPr lang="en-US" sz="1350" dirty="0"/>
-          </a:p>
-        </p:txBody>
-      </p:sp>
-      <p:sp>
-        <p:nvSpPr>
-          <p:cNvPr id="6" name="Shape 4"/>
-          <p:cNvSpPr/>
-          <p:nvPr/>
-        </p:nvSpPr>
-        <p:spPr>
-          <a:xfrm>
-            <a:off x="7201632" y="2395728"/>
-            <a:ext cx="4423136" cy="3246120"/>
-          </a:xfrm>
-          <a:prstGeom prst="roundRect">
-            <a:avLst>
-              <a:gd name="adj" fmla="val 2535"/>
-            </a:avLst>
-          </a:prstGeom>
-          <a:solidFill>
-            <a:srgbClr val="FBEAEC"/>
-          </a:solidFill>
-          <a:ln/>
-          <a:effectLst>
-            <a:outerShdw sx="100000" sy="100000" kx="0" ky="0" algn="bl" rotWithShape="0" blurRad="88900" dist="25400" dir="5400000">
-              <a:srgbClr val="22303C">
-                <a:alpha val="12000"/>
-              </a:srgbClr>
-            </a:outerShdw>
-          </a:effectLst>
-        </p:spPr>
-      </p:sp>
-      <p:sp>
-        <p:nvSpPr>
-          <p:cNvPr id="7" name="Text 5"/>
-          <p:cNvSpPr/>
-          <p:nvPr/>
-        </p:nvSpPr>
-        <p:spPr>
-          <a:xfrm>
-            <a:off x="7439376" y="2578608"/>
-            <a:ext cx="3965936" cy="457200"/>
-          </a:xfrm>
-          <a:prstGeom prst="rect">
-            <a:avLst/>
-          </a:prstGeom>
-          <a:noFill/>
-          <a:ln/>
-        </p:spPr>
-        <p:txBody>
-          <a:bodyPr wrap="square" lIns="0" tIns="0" rIns="0" bIns="0" rtlCol="0" anchor="ctr"/>
-          <a:lstStyle/>
-          <a:p>
-            <a:pPr indent="0" marL="0">
-              <a:buNone/>
-            </a:pPr>
-            <a:r>
-              <a:rPr lang="en-US" sz="1500" b="1" dirty="0">
-                <a:solidFill>
-                  <a:srgbClr val="C62133"/>
-                </a:solidFill>
-                <a:latin typeface="Calibri" pitchFamily="34" charset="0"/>
-                <a:ea typeface="Calibri" pitchFamily="34" charset="-122"/>
-                <a:cs typeface="Calibri" pitchFamily="34" charset="-120"/>
-              </a:rPr>
-              <a:t>ANSWER  </a:t>
-            </a:r>
-            <a:pPr indent="0" marL="0">
-              <a:buNone/>
-            </a:pPr>
-            <a:r>
-              <a:rPr lang="en-US" sz="1500" b="1" dirty="0">
-                <a:solidFill>
-                  <a:srgbClr val="1B2A38"/>
-                </a:solidFill>
-                <a:latin typeface="Calibri" pitchFamily="34" charset="0"/>
-                <a:ea typeface="Calibri" pitchFamily="34" charset="-122"/>
-                <a:cs typeface="Calibri" pitchFamily="34" charset="-120"/>
-              </a:rPr>
-              <a:t>B — Smear review + citrate redraw</a:t>
-            </a:r>
-            <a:endParaRPr lang="en-US" sz="1500" dirty="0"/>
-          </a:p>
-        </p:txBody>
-      </p:sp>
-      <p:sp>
-        <p:nvSpPr>
-          <p:cNvPr id="8" name="Text 6"/>
-          <p:cNvSpPr/>
-          <p:nvPr/>
-        </p:nvSpPr>
-        <p:spPr>
-          <a:xfrm>
-            <a:off x="7439376" y="3127248"/>
-            <a:ext cx="3947648" cy="2377440"/>
-          </a:xfrm>
-          <a:prstGeom prst="rect">
-            <a:avLst/>
-          </a:prstGeom>
-          <a:noFill/>
-          <a:ln/>
-        </p:spPr>
-        <p:txBody>
-          <a:bodyPr wrap="square" lIns="0" tIns="0" rIns="0" bIns="0" rtlCol="0" anchor="t"/>
-          <a:lstStyle/>
-          <a:p>
-            <a:pPr algn="l" indent="0" marL="0">
-              <a:lnSpc>
-                <a:spcPct val="108000"/>
-              </a:lnSpc>
-              <a:buNone/>
-            </a:pPr>
-            <a:r>
-              <a:rPr lang="en-US" sz="1250" dirty="0">
-                <a:solidFill>
-                  <a:srgbClr val="33444F"/>
-                </a:solidFill>
-                <a:latin typeface="Calibri" pitchFamily="34" charset="0"/>
-                <a:ea typeface="Calibri" pitchFamily="34" charset="-122"/>
-                <a:cs typeface="Calibri" pitchFamily="34" charset="-120"/>
-              </a:rPr>
-              <a:t>Platelet clumps on the smear confirm the artifact; recollection in citrate yields an accurate count.</a:t>
-            </a:r>
-            <a:endParaRPr lang="en-US" sz="1250" dirty="0"/>
           </a:p>
         </p:txBody>
       </p:sp>
@@ -11090,6 +10686,10 @@
           </a:solidFill>
           <a:ln/>
         </p:spPr>
+        <p:txBody>
+          <a:bodyPr/>
+          <a:p/>
+        </p:txBody>
       </p:sp>
       <p:sp>
         <p:nvSpPr>
@@ -11117,6 +10717,10 @@
             </a:outerShdw>
           </a:effectLst>
         </p:spPr>
+        <p:txBody>
+          <a:bodyPr/>
+          <a:p/>
+        </p:txBody>
       </p:sp>
       <p:sp>
         <p:nvSpPr>
@@ -11217,6 +10821,10 @@
           </a:solidFill>
           <a:ln/>
         </p:spPr>
+        <p:txBody>
+          <a:bodyPr/>
+          <a:p/>
+        </p:txBody>
       </p:sp>
       <p:sp>
         <p:nvSpPr>
@@ -11244,6 +10852,10 @@
             </a:outerShdw>
           </a:effectLst>
         </p:spPr>
+        <p:txBody>
+          <a:bodyPr/>
+          <a:p/>
+        </p:txBody>
       </p:sp>
       <p:sp>
         <p:nvSpPr>
@@ -11344,6 +10956,10 @@
           </a:solidFill>
           <a:ln/>
         </p:spPr>
+        <p:txBody>
+          <a:bodyPr/>
+          <a:p/>
+        </p:txBody>
       </p:sp>
       <p:sp>
         <p:nvSpPr>
@@ -11371,6 +10987,10 @@
             </a:outerShdw>
           </a:effectLst>
         </p:spPr>
+        <p:txBody>
+          <a:bodyPr/>
+          <a:p/>
+        </p:txBody>
       </p:sp>
       <p:sp>
         <p:nvSpPr>
@@ -11471,6 +11091,10 @@
           </a:solidFill>
           <a:ln/>
         </p:spPr>
+        <p:txBody>
+          <a:bodyPr/>
+          <a:p/>
+        </p:txBody>
       </p:sp>
       <p:sp>
         <p:nvSpPr>
@@ -11498,6 +11122,10 @@
             </a:outerShdw>
           </a:effectLst>
         </p:spPr>
+        <p:txBody>
+          <a:bodyPr/>
+          <a:p/>
+        </p:txBody>
       </p:sp>
       <p:sp>
         <p:nvSpPr>
@@ -11598,6 +11226,10 @@
           </a:solidFill>
           <a:ln/>
         </p:spPr>
+        <p:txBody>
+          <a:bodyPr/>
+          <a:p/>
+        </p:txBody>
       </p:sp>
       <p:sp>
         <p:nvSpPr>
@@ -11625,6 +11257,10 @@
             </a:outerShdw>
           </a:effectLst>
         </p:spPr>
+        <p:txBody>
+          <a:bodyPr/>
+          <a:p/>
+        </p:txBody>
       </p:sp>
       <p:sp>
         <p:nvSpPr>
@@ -12108,6 +11744,1982 @@
 </p:sld>
 </file>
 
+<file path=ppt/slides/slide26.xml><?xml version="1.0" encoding="utf-8"?>
+<p:sld xmlns:a="http://schemas.openxmlformats.org/drawingml/2006/main" xmlns:p="http://schemas.openxmlformats.org/presentationml/2006/main" xmlns:r="http://schemas.openxmlformats.org/officeDocument/2006/relationships">
+  <p:cSld>
+    <p:spTree>
+      <p:nvGrpSpPr>
+        <p:cNvPr id="1" name=""/>
+        <p:cNvGrpSpPr/>
+        <p:nvPr/>
+      </p:nvGrpSpPr>
+      <p:grpSpPr/>
+      <p:sp>
+        <p:nvSpPr>
+          <p:cNvPr id="2" name="Text 0"/>
+          <p:cNvSpPr/>
+          <p:nvPr/>
+        </p:nvSpPr>
+        <p:spPr>
+          <a:xfrm>
+            <a:off x="566928" y="329184"/>
+            <a:ext cx="10515600" cy="310896"/>
+          </a:xfrm>
+          <a:prstGeom prst="rect">
+            <a:avLst/>
+          </a:prstGeom>
+          <a:noFill/>
+          <a:ln/>
+        </p:spPr>
+        <p:txBody>
+          <a:bodyPr wrap="square" lIns="0" tIns="0" rIns="0" bIns="0" rtlCol="0" anchor="ctr"/>
+          <a:lstStyle/>
+          <a:p>
+            <a:pPr algn="l" indent="0" marL="0">
+              <a:buNone/>
+            </a:pPr>
+            <a:r>
+              <a:rPr lang="en-US" sz="1100" b="1" spc="150" kern="0" dirty="0">
+                <a:solidFill>
+                  <a:srgbClr val="C62133"/>
+                </a:solidFill>
+                <a:latin typeface="Calibri" pitchFamily="34" charset="0"/>
+                <a:ea typeface="Calibri" pitchFamily="34" charset="-122"/>
+                <a:cs typeface="Calibri" pitchFamily="34" charset="-120"/>
+              </a:rPr>
+              <a:t>HEMATOLOGY &amp; COAGULATION   ·   BOARD REVIEW  ·  Q4</a:t>
+            </a:r>
+            <a:endParaRPr lang="en-US" sz="1100" dirty="0"/>
+          </a:p>
+        </p:txBody>
+      </p:sp>
+      <p:sp>
+        <p:nvSpPr>
+          <p:cNvPr id="3" name="Text 1"/>
+          <p:cNvSpPr/>
+          <p:nvPr/>
+        </p:nvSpPr>
+        <p:spPr>
+          <a:xfrm>
+            <a:off x="566928" y="713232"/>
+            <a:ext cx="11064240" cy="749808"/>
+          </a:xfrm>
+          <a:prstGeom prst="rect">
+            <a:avLst/>
+          </a:prstGeom>
+          <a:noFill/>
+          <a:ln/>
+        </p:spPr>
+        <p:txBody>
+          <a:bodyPr wrap="square" lIns="0" tIns="0" rIns="0" bIns="0" rtlCol="0" anchor="ctr"/>
+          <a:lstStyle/>
+          <a:p>
+            <a:pPr algn="l" indent="0" marL="0">
+              <a:buNone/>
+            </a:pPr>
+            <a:r>
+              <a:rPr lang="en-US" sz="2600" b="1" dirty="0">
+                <a:solidFill>
+                  <a:srgbClr val="0E3A5F"/>
+                </a:solidFill>
+                <a:latin typeface="Calibri" pitchFamily="34" charset="0"/>
+                <a:ea typeface="Calibri" pitchFamily="34" charset="-122"/>
+                <a:cs typeface="Calibri" pitchFamily="34" charset="-120"/>
+              </a:rPr>
+              <a:t>Board-Style Review</a:t>
+            </a:r>
+            <a:endParaRPr lang="en-US" sz="2600" dirty="0"/>
+          </a:p>
+        </p:txBody>
+      </p:sp>
+      <p:sp>
+        <p:nvSpPr>
+          <p:cNvPr id="4" name="Text 2"/>
+          <p:cNvSpPr/>
+          <p:nvPr/>
+        </p:nvSpPr>
+        <p:spPr>
+          <a:xfrm>
+            <a:off x="566928" y="1417320"/>
+            <a:ext cx="11057839" cy="914400"/>
+          </a:xfrm>
+          <a:prstGeom prst="rect">
+            <a:avLst/>
+          </a:prstGeom>
+          <a:noFill/>
+          <a:ln/>
+        </p:spPr>
+        <p:txBody>
+          <a:bodyPr wrap="square" lIns="0" tIns="0" rIns="0" bIns="0" rtlCol="0" anchor="t"/>
+          <a:lstStyle/>
+          <a:p>
+            <a:pPr algn="l" indent="0" marL="0">
+              <a:lnSpc>
+                <a:spcPct val="105000"/>
+              </a:lnSpc>
+              <a:buNone/>
+            </a:pPr>
+            <a:r>
+              <a:rPr lang="en-US" sz="1450" b="1" dirty="0">
+                <a:solidFill>
+                  <a:srgbClr val="1B2A38"/>
+                </a:solidFill>
+                <a:latin typeface="Calibri" pitchFamily="34" charset="0"/>
+                <a:ea typeface="Calibri" pitchFamily="34" charset="-122"/>
+                <a:cs typeface="Calibri" pitchFamily="34" charset="-120"/>
+              </a:rPr>
+              <a:t>Pseudothrombocytopenia from EDTA is best confirmed by:</a:t>
+            </a:r>
+            <a:endParaRPr lang="en-US" sz="1450" dirty="0"/>
+          </a:p>
+        </p:txBody>
+      </p:sp>
+      <p:sp>
+        <p:nvSpPr>
+          <p:cNvPr id="5" name="Text 3"/>
+          <p:cNvSpPr/>
+          <p:nvPr/>
+        </p:nvSpPr>
+        <p:spPr>
+          <a:xfrm>
+            <a:off x="658368" y="2395728"/>
+            <a:ext cx="6192390" cy="3017520"/>
+          </a:xfrm>
+          <a:prstGeom prst="rect">
+            <a:avLst/>
+          </a:prstGeom>
+          <a:noFill/>
+          <a:ln/>
+        </p:spPr>
+        <p:txBody>
+          <a:bodyPr wrap="square" lIns="0" tIns="0" rIns="0" bIns="0" rtlCol="0" anchor="t"/>
+          <a:lstStyle/>
+          <a:p>
+            <a:pPr algn="l" indent="0" marL="0">
+              <a:spcAft>
+                <a:spcPts val="600"/>
+              </a:spcAft>
+              <a:buNone/>
+            </a:pPr>
+            <a:r>
+              <a:rPr lang="en-US" sz="1350" dirty="0">
+                <a:solidFill>
+                  <a:srgbClr val="33444F"/>
+                </a:solidFill>
+                <a:latin typeface="Calibri" pitchFamily="34" charset="0"/>
+                <a:ea typeface="Calibri" pitchFamily="34" charset="-122"/>
+                <a:cs typeface="Calibri" pitchFamily="34" charset="-120"/>
+              </a:rPr>
+              <a:t>A. Repeating in EDTA</a:t>
+            </a:r>
+            <a:endParaRPr lang="en-US" sz="1350" dirty="0"/>
+          </a:p>
+          <a:p>
+            <a:pPr algn="l" indent="0" marL="0">
+              <a:spcAft>
+                <a:spcPts val="600"/>
+              </a:spcAft>
+              <a:buNone/>
+            </a:pPr>
+            <a:r>
+              <a:rPr lang="en-US" sz="1350" b="1" dirty="0">
+                <a:solidFill>
+                  <a:srgbClr val="8E1622"/>
+                </a:solidFill>
+                <a:latin typeface="Calibri" pitchFamily="34" charset="0"/>
+                <a:ea typeface="Calibri" pitchFamily="34" charset="-122"/>
+                <a:cs typeface="Calibri" pitchFamily="34" charset="-120"/>
+              </a:rPr>
+              <a:t>B. Reviewing the smear for clumps and recollecting in citrate</a:t>
+            </a:r>
+            <a:endParaRPr lang="en-US" sz="1350" dirty="0"/>
+          </a:p>
+          <a:p>
+            <a:pPr algn="l" indent="0" marL="0">
+              <a:spcAft>
+                <a:spcPts val="600"/>
+              </a:spcAft>
+              <a:buNone/>
+            </a:pPr>
+            <a:r>
+              <a:rPr lang="en-US" sz="1350" dirty="0">
+                <a:solidFill>
+                  <a:srgbClr val="33444F"/>
+                </a:solidFill>
+                <a:latin typeface="Calibri" pitchFamily="34" charset="0"/>
+                <a:ea typeface="Calibri" pitchFamily="34" charset="-122"/>
+                <a:cs typeface="Calibri" pitchFamily="34" charset="-120"/>
+              </a:rPr>
+              <a:t>C. Transfusing platelets</a:t>
+            </a:r>
+            <a:endParaRPr lang="en-US" sz="1350" dirty="0"/>
+          </a:p>
+          <a:p>
+            <a:pPr algn="l" indent="0" marL="0">
+              <a:spcAft>
+                <a:spcPts val="600"/>
+              </a:spcAft>
+              <a:buNone/>
+            </a:pPr>
+            <a:r>
+              <a:rPr lang="en-US" sz="1350" dirty="0">
+                <a:solidFill>
+                  <a:srgbClr val="33444F"/>
+                </a:solidFill>
+                <a:latin typeface="Calibri" pitchFamily="34" charset="0"/>
+                <a:ea typeface="Calibri" pitchFamily="34" charset="-122"/>
+                <a:cs typeface="Calibri" pitchFamily="34" charset="-120"/>
+              </a:rPr>
+              <a:t>D. A bone marrow biopsy</a:t>
+            </a:r>
+            <a:endParaRPr lang="en-US" sz="1350" dirty="0"/>
+          </a:p>
+          <a:p>
+            <a:pPr algn="l" indent="0" marL="0">
+              <a:spcAft>
+                <a:spcPts val="600"/>
+              </a:spcAft>
+              <a:buNone/>
+            </a:pPr>
+            <a:r>
+              <a:rPr lang="en-US" sz="1350" dirty="0">
+                <a:solidFill>
+                  <a:srgbClr val="33444F"/>
+                </a:solidFill>
+                <a:latin typeface="Calibri" pitchFamily="34" charset="0"/>
+                <a:ea typeface="Calibri" pitchFamily="34" charset="-122"/>
+                <a:cs typeface="Calibri" pitchFamily="34" charset="-120"/>
+              </a:rPr>
+              <a:t>E. Ignoring it</a:t>
+            </a:r>
+            <a:endParaRPr lang="en-US" sz="1350" dirty="0"/>
+          </a:p>
+        </p:txBody>
+      </p:sp>
+      <p:sp>
+        <p:nvSpPr>
+          <p:cNvPr id="6" name="Shape 4"/>
+          <p:cNvSpPr/>
+          <p:nvPr/>
+        </p:nvSpPr>
+        <p:spPr>
+          <a:xfrm>
+            <a:off x="7201632" y="2395728"/>
+            <a:ext cx="4423136" cy="3246120"/>
+          </a:xfrm>
+          <a:prstGeom prst="roundRect">
+            <a:avLst>
+              <a:gd name="adj" fmla="val 2535"/>
+            </a:avLst>
+          </a:prstGeom>
+          <a:solidFill>
+            <a:srgbClr val="FBEAEC"/>
+          </a:solidFill>
+          <a:ln/>
+          <a:effectLst>
+            <a:outerShdw sx="100000" sy="100000" kx="0" ky="0" algn="bl" rotWithShape="0" blurRad="88900" dist="25400" dir="5400000">
+              <a:srgbClr val="22303C">
+                <a:alpha val="12000"/>
+              </a:srgbClr>
+            </a:outerShdw>
+          </a:effectLst>
+        </p:spPr>
+        <p:txBody>
+          <a:bodyPr/>
+          <a:p/>
+        </p:txBody>
+      </p:sp>
+      <p:sp>
+        <p:nvSpPr>
+          <p:cNvPr id="7" name="Text 5"/>
+          <p:cNvSpPr/>
+          <p:nvPr/>
+        </p:nvSpPr>
+        <p:spPr>
+          <a:xfrm>
+            <a:off x="7439376" y="2578608"/>
+            <a:ext cx="3965936" cy="457200"/>
+          </a:xfrm>
+          <a:prstGeom prst="rect">
+            <a:avLst/>
+          </a:prstGeom>
+          <a:noFill/>
+          <a:ln/>
+        </p:spPr>
+        <p:txBody>
+          <a:bodyPr wrap="square" lIns="0" tIns="0" rIns="0" bIns="0" rtlCol="0" anchor="ctr"/>
+          <a:lstStyle/>
+          <a:p>
+            <a:pPr indent="0" marL="0">
+              <a:buNone/>
+            </a:pPr>
+            <a:r>
+              <a:rPr lang="en-US" sz="1500" b="1" dirty="0">
+                <a:solidFill>
+                  <a:srgbClr val="C62133"/>
+                </a:solidFill>
+                <a:latin typeface="Calibri" pitchFamily="34" charset="0"/>
+                <a:ea typeface="Calibri" pitchFamily="34" charset="-122"/>
+                <a:cs typeface="Calibri" pitchFamily="34" charset="-120"/>
+              </a:rPr>
+              <a:t>ANSWER  </a:t>
+            </a:r>
+            <a:pPr indent="0" marL="0">
+              <a:buNone/>
+            </a:pPr>
+            <a:r>
+              <a:rPr lang="en-US" sz="1500" b="1" dirty="0">
+                <a:solidFill>
+                  <a:srgbClr val="1B2A38"/>
+                </a:solidFill>
+                <a:latin typeface="Calibri" pitchFamily="34" charset="0"/>
+                <a:ea typeface="Calibri" pitchFamily="34" charset="-122"/>
+                <a:cs typeface="Calibri" pitchFamily="34" charset="-120"/>
+              </a:rPr>
+              <a:t>B — Smear review + citrate redraw</a:t>
+            </a:r>
+            <a:endParaRPr lang="en-US" sz="1500" dirty="0"/>
+          </a:p>
+        </p:txBody>
+      </p:sp>
+      <p:sp>
+        <p:nvSpPr>
+          <p:cNvPr id="8" name="Text 6"/>
+          <p:cNvSpPr/>
+          <p:nvPr/>
+        </p:nvSpPr>
+        <p:spPr>
+          <a:xfrm>
+            <a:off x="7439376" y="3127248"/>
+            <a:ext cx="3947648" cy="2377440"/>
+          </a:xfrm>
+          <a:prstGeom prst="rect">
+            <a:avLst/>
+          </a:prstGeom>
+          <a:noFill/>
+          <a:ln/>
+        </p:spPr>
+        <p:txBody>
+          <a:bodyPr wrap="square" lIns="0" tIns="0" rIns="0" bIns="0" rtlCol="0" anchor="t"/>
+          <a:lstStyle/>
+          <a:p>
+            <a:pPr algn="l" indent="0" marL="0">
+              <a:lnSpc>
+                <a:spcPct val="108000"/>
+              </a:lnSpc>
+              <a:buNone/>
+            </a:pPr>
+            <a:r>
+              <a:rPr lang="en-US" sz="1250" dirty="0">
+                <a:solidFill>
+                  <a:srgbClr val="33444F"/>
+                </a:solidFill>
+                <a:latin typeface="Calibri" pitchFamily="34" charset="0"/>
+                <a:ea typeface="Calibri" pitchFamily="34" charset="-122"/>
+                <a:cs typeface="Calibri" pitchFamily="34" charset="-120"/>
+              </a:rPr>
+              <a:t>Platelet clumps on the smear confirm the artifact; recollection in citrate yields an accurate count.</a:t>
+            </a:r>
+            <a:endParaRPr lang="en-US" sz="1250" dirty="0"/>
+          </a:p>
+        </p:txBody>
+      </p:sp>
+      <p:sp>
+        <p:nvSpPr>
+          <p:cNvPr id="9" name="Text 7"/>
+          <p:cNvSpPr/>
+          <p:nvPr/>
+        </p:nvSpPr>
+        <p:spPr>
+          <a:xfrm>
+            <a:off x="566928" y="6473952"/>
+            <a:ext cx="7772400" cy="274320"/>
+          </a:xfrm>
+          <a:prstGeom prst="rect">
+            <a:avLst/>
+          </a:prstGeom>
+          <a:noFill/>
+          <a:ln/>
+        </p:spPr>
+        <p:txBody>
+          <a:bodyPr wrap="square" lIns="0" tIns="0" rIns="0" bIns="0" rtlCol="0" anchor="ctr"/>
+          <a:lstStyle/>
+          <a:p>
+            <a:pPr algn="l" indent="0" marL="0">
+              <a:buNone/>
+            </a:pPr>
+            <a:r>
+              <a:rPr lang="en-US" sz="850" dirty="0">
+                <a:solidFill>
+                  <a:srgbClr val="9AA8B4"/>
+                </a:solidFill>
+                <a:latin typeface="Calibri" pitchFamily="34" charset="0"/>
+                <a:ea typeface="Calibri" pitchFamily="34" charset="-122"/>
+                <a:cs typeface="Calibri" pitchFamily="34" charset="-120"/>
+              </a:rPr>
+              <a:t>Makassed General Hospital  ·  Department of Laboratory Medicine</a:t>
+            </a:r>
+            <a:endParaRPr lang="en-US" sz="850" dirty="0"/>
+          </a:p>
+        </p:txBody>
+      </p:sp>
+      <p:sp>
+        <p:nvSpPr>
+          <p:cNvPr id="10" name="Text 8"/>
+          <p:cNvSpPr/>
+          <p:nvPr/>
+        </p:nvSpPr>
+        <p:spPr>
+          <a:xfrm>
+            <a:off x="9814255" y="6473952"/>
+            <a:ext cx="1828800" cy="274320"/>
+          </a:xfrm>
+          <a:prstGeom prst="rect">
+            <a:avLst/>
+          </a:prstGeom>
+          <a:noFill/>
+          <a:ln/>
+        </p:spPr>
+        <p:txBody>
+          <a:bodyPr wrap="square" lIns="0" tIns="0" rIns="0" bIns="0" rtlCol="0" anchor="ctr"/>
+          <a:lstStyle/>
+          <a:p>
+            <a:pPr algn="r" indent="0" marL="0">
+              <a:buNone/>
+            </a:pPr>
+            <a:r>
+              <a:rPr lang="en-US" sz="850" dirty="0">
+                <a:solidFill>
+                  <a:srgbClr val="9AA8B4"/>
+                </a:solidFill>
+                <a:latin typeface="Calibri" pitchFamily="34" charset="0"/>
+                <a:ea typeface="Calibri" pitchFamily="34" charset="-122"/>
+                <a:cs typeface="Calibri" pitchFamily="34" charset="-120"/>
+              </a:rPr>
+              <a:t>CP Lecture Series</a:t>
+            </a:r>
+            <a:pPr algn="r" indent="0" marL="0">
+              <a:buNone/>
+            </a:pPr>
+            <a:r>
+              <a:rPr lang="en-US" sz="850" dirty="0">
+                <a:solidFill>
+                  <a:srgbClr val="DCE4EC"/>
+                </a:solidFill>
+                <a:latin typeface="Calibri" pitchFamily="34" charset="0"/>
+                <a:ea typeface="Calibri" pitchFamily="34" charset="-122"/>
+                <a:cs typeface="Calibri" pitchFamily="34" charset="-120"/>
+              </a:rPr>
+              <a:t>   ·   </a:t>
+            </a:r>
+            <a:pPr algn="r" indent="0" marL="0">
+              <a:buNone/>
+            </a:pPr>
+            <a:r>
+              <a:rPr lang="en-US" sz="850" b="1" dirty="0">
+                <a:solidFill>
+                  <a:srgbClr val="C62133"/>
+                </a:solidFill>
+                <a:latin typeface="Calibri" pitchFamily="34" charset="0"/>
+                <a:ea typeface="Calibri" pitchFamily="34" charset="-122"/>
+                <a:cs typeface="Calibri" pitchFamily="34" charset="-120"/>
+              </a:rPr>
+              <a:t>20</a:t>
+            </a:r>
+            <a:endParaRPr lang="en-US" sz="850" dirty="0"/>
+          </a:p>
+        </p:txBody>
+      </p:sp>
+    </p:spTree>
+  </p:cSld>
+  <p:clrMapOvr>
+    <a:masterClrMapping/>
+  </p:clrMapOvr>
+</p:sld>
+</file>
+
+<file path=ppt/slides/slide27.xml><?xml version="1.0" encoding="utf-8"?>
+<p:sld xmlns:a="http://schemas.openxmlformats.org/drawingml/2006/main" xmlns:p="http://schemas.openxmlformats.org/presentationml/2006/main" xmlns:r="http://schemas.openxmlformats.org/officeDocument/2006/relationships">
+  <p:cSld>
+    <p:spTree>
+      <p:nvGrpSpPr>
+        <p:cNvPr id="1" name=""/>
+        <p:cNvGrpSpPr/>
+        <p:nvPr/>
+      </p:nvGrpSpPr>
+      <p:grpSpPr/>
+      <p:sp>
+        <p:nvSpPr>
+          <p:cNvPr id="2" name="Text 0"/>
+          <p:cNvSpPr/>
+          <p:nvPr/>
+        </p:nvSpPr>
+        <p:spPr>
+          <a:xfrm>
+            <a:off x="566928" y="329184"/>
+            <a:ext cx="10515600" cy="310896"/>
+          </a:xfrm>
+          <a:prstGeom prst="rect">
+            <a:avLst/>
+          </a:prstGeom>
+          <a:noFill/>
+          <a:ln/>
+        </p:spPr>
+        <p:txBody>
+          <a:bodyPr wrap="square" lIns="0" tIns="0" rIns="0" bIns="0" rtlCol="0" anchor="ctr"/>
+          <a:lstStyle/>
+          <a:p>
+            <a:pPr algn="l" indent="0" marL="0">
+              <a:buNone/>
+            </a:pPr>
+            <a:r>
+              <a:rPr lang="en-US" sz="1100" b="1" spc="150" kern="0" dirty="0">
+                <a:solidFill>
+                  <a:srgbClr val="C62133"/>
+                </a:solidFill>
+                <a:latin typeface="Calibri" pitchFamily="34" charset="0"/>
+                <a:ea typeface="Calibri" pitchFamily="34" charset="-122"/>
+                <a:cs typeface="Calibri" pitchFamily="34" charset="-120"/>
+              </a:rPr>
+              <a:t>HEMATOLOGY &amp; COAGULATION   ·   BOARD REVIEW  ·  Q3</a:t>
+            </a:r>
+            <a:endParaRPr lang="en-US" sz="1100" dirty="0"/>
+          </a:p>
+        </p:txBody>
+      </p:sp>
+      <p:sp>
+        <p:nvSpPr>
+          <p:cNvPr id="3" name="Text 1"/>
+          <p:cNvSpPr/>
+          <p:nvPr/>
+        </p:nvSpPr>
+        <p:spPr>
+          <a:xfrm>
+            <a:off x="566928" y="713232"/>
+            <a:ext cx="11064240" cy="749808"/>
+          </a:xfrm>
+          <a:prstGeom prst="rect">
+            <a:avLst/>
+          </a:prstGeom>
+          <a:noFill/>
+          <a:ln/>
+        </p:spPr>
+        <p:txBody>
+          <a:bodyPr wrap="square" lIns="0" tIns="0" rIns="0" bIns="0" rtlCol="0" anchor="ctr"/>
+          <a:lstStyle/>
+          <a:p>
+            <a:pPr algn="l" indent="0" marL="0">
+              <a:buNone/>
+            </a:pPr>
+            <a:r>
+              <a:rPr lang="en-US" sz="2600" b="1" dirty="0">
+                <a:solidFill>
+                  <a:srgbClr val="0E3A5F"/>
+                </a:solidFill>
+                <a:latin typeface="Calibri" pitchFamily="34" charset="0"/>
+                <a:ea typeface="Calibri" pitchFamily="34" charset="-122"/>
+                <a:cs typeface="Calibri" pitchFamily="34" charset="-120"/>
+              </a:rPr>
+              <a:t>Board-Style Review</a:t>
+            </a:r>
+            <a:endParaRPr lang="en-US" sz="2600" dirty="0"/>
+          </a:p>
+        </p:txBody>
+      </p:sp>
+      <p:sp>
+        <p:nvSpPr>
+          <p:cNvPr id="4" name="Text 2"/>
+          <p:cNvSpPr/>
+          <p:nvPr/>
+        </p:nvSpPr>
+        <p:spPr>
+          <a:xfrm>
+            <a:off x="566928" y="1417320"/>
+            <a:ext cx="11057839" cy="914400"/>
+          </a:xfrm>
+          <a:prstGeom prst="rect">
+            <a:avLst/>
+          </a:prstGeom>
+          <a:noFill/>
+          <a:ln/>
+        </p:spPr>
+        <p:txBody>
+          <a:bodyPr wrap="square" lIns="0" tIns="0" rIns="0" bIns="0" rtlCol="0" anchor="t"/>
+          <a:lstStyle/>
+          <a:p>
+            <a:pPr algn="l" indent="0" marL="0">
+              <a:lnSpc>
+                <a:spcPct val="105000"/>
+              </a:lnSpc>
+              <a:buNone/>
+            </a:pPr>
+            <a:r>
+              <a:rPr lang="en-US" sz="1450" b="1" dirty="0">
+                <a:solidFill>
+                  <a:srgbClr val="1B2A38"/>
+                </a:solidFill>
+                <a:latin typeface="Calibri" pitchFamily="34" charset="0"/>
+                <a:ea typeface="Calibri" pitchFamily="34" charset="-122"/>
+                <a:cs typeface="Calibri" pitchFamily="34" charset="-120"/>
+              </a:rPr>
+              <a:t>Schistocytes on the smear should prompt evaluation for:</a:t>
+            </a:r>
+            <a:endParaRPr lang="en-US" sz="1450" dirty="0"/>
+          </a:p>
+        </p:txBody>
+      </p:sp>
+      <p:sp>
+        <p:nvSpPr>
+          <p:cNvPr id="5" name="Text 3"/>
+          <p:cNvSpPr/>
+          <p:nvPr/>
+        </p:nvSpPr>
+        <p:spPr>
+          <a:xfrm>
+            <a:off x="658368" y="2395728"/>
+            <a:ext cx="6192390" cy="3017520"/>
+          </a:xfrm>
+          <a:prstGeom prst="rect">
+            <a:avLst/>
+          </a:prstGeom>
+          <a:noFill/>
+          <a:ln/>
+        </p:spPr>
+        <p:txBody>
+          <a:bodyPr wrap="square" lIns="0" tIns="0" rIns="0" bIns="0" rtlCol="0" anchor="t"/>
+          <a:lstStyle/>
+          <a:p>
+            <a:pPr algn="l" indent="0" marL="0">
+              <a:spcAft>
+                <a:spcPts val="600"/>
+              </a:spcAft>
+              <a:buNone/>
+            </a:pPr>
+            <a:r>
+              <a:rPr lang="en-US" sz="1350" dirty="0">
+                <a:solidFill>
+                  <a:srgbClr val="33444F"/>
+                </a:solidFill>
+                <a:latin typeface="Calibri" pitchFamily="34" charset="0"/>
+                <a:ea typeface="Calibri" pitchFamily="34" charset="-122"/>
+                <a:cs typeface="Calibri" pitchFamily="34" charset="-120"/>
+              </a:rPr>
+              <a:t>A. Iron deficiency</a:t>
+            </a:r>
+            <a:endParaRPr lang="en-US" sz="1350" dirty="0"/>
+          </a:p>
+          <a:p>
+            <a:pPr algn="l" indent="0" marL="0">
+              <a:spcAft>
+                <a:spcPts val="600"/>
+              </a:spcAft>
+              <a:buNone/>
+            </a:pPr>
+            <a:r>
+              <a:rPr lang="en-US" sz="1350" b="1" dirty="0">
+                <a:solidFill>
+                  <a:srgbClr val="8E1622"/>
+                </a:solidFill>
+                <a:latin typeface="Calibri" pitchFamily="34" charset="0"/>
+                <a:ea typeface="Calibri" pitchFamily="34" charset="-122"/>
+                <a:cs typeface="Calibri" pitchFamily="34" charset="-120"/>
+              </a:rPr>
+              <a:t>B. Microangiopathic hemolysis (TTP/HUS, DIC)</a:t>
+            </a:r>
+            <a:endParaRPr lang="en-US" sz="1350" dirty="0"/>
+          </a:p>
+          <a:p>
+            <a:pPr algn="l" indent="0" marL="0">
+              <a:spcAft>
+                <a:spcPts val="600"/>
+              </a:spcAft>
+              <a:buNone/>
+            </a:pPr>
+            <a:r>
+              <a:rPr lang="en-US" sz="1350" dirty="0">
+                <a:solidFill>
+                  <a:srgbClr val="33444F"/>
+                </a:solidFill>
+                <a:latin typeface="Calibri" pitchFamily="34" charset="0"/>
+                <a:ea typeface="Calibri" pitchFamily="34" charset="-122"/>
+                <a:cs typeface="Calibri" pitchFamily="34" charset="-120"/>
+              </a:rPr>
+              <a:t>C. Vitamin B12 deficiency</a:t>
+            </a:r>
+            <a:endParaRPr lang="en-US" sz="1350" dirty="0"/>
+          </a:p>
+          <a:p>
+            <a:pPr algn="l" indent="0" marL="0">
+              <a:spcAft>
+                <a:spcPts val="600"/>
+              </a:spcAft>
+              <a:buNone/>
+            </a:pPr>
+            <a:r>
+              <a:rPr lang="en-US" sz="1350" dirty="0">
+                <a:solidFill>
+                  <a:srgbClr val="33444F"/>
+                </a:solidFill>
+                <a:latin typeface="Calibri" pitchFamily="34" charset="0"/>
+                <a:ea typeface="Calibri" pitchFamily="34" charset="-122"/>
+                <a:cs typeface="Calibri" pitchFamily="34" charset="-120"/>
+              </a:rPr>
+              <a:t>D. Hereditary spherocytosis</a:t>
+            </a:r>
+            <a:endParaRPr lang="en-US" sz="1350" dirty="0"/>
+          </a:p>
+          <a:p>
+            <a:pPr algn="l" indent="0" marL="0">
+              <a:spcAft>
+                <a:spcPts val="600"/>
+              </a:spcAft>
+              <a:buNone/>
+            </a:pPr>
+            <a:r>
+              <a:rPr lang="en-US" sz="1350" dirty="0">
+                <a:solidFill>
+                  <a:srgbClr val="33444F"/>
+                </a:solidFill>
+                <a:latin typeface="Calibri" pitchFamily="34" charset="0"/>
+                <a:ea typeface="Calibri" pitchFamily="34" charset="-122"/>
+                <a:cs typeface="Calibri" pitchFamily="34" charset="-120"/>
+              </a:rPr>
+              <a:t>E. Rouleaux</a:t>
+            </a:r>
+            <a:endParaRPr lang="en-US" sz="1350" dirty="0"/>
+          </a:p>
+        </p:txBody>
+      </p:sp>
+      <p:sp>
+        <p:nvSpPr>
+          <p:cNvPr id="6" name="Shape 4"/>
+          <p:cNvSpPr/>
+          <p:nvPr/>
+        </p:nvSpPr>
+        <p:spPr>
+          <a:xfrm>
+            <a:off x="7201632" y="2395728"/>
+            <a:ext cx="4423136" cy="3246120"/>
+          </a:xfrm>
+          <a:prstGeom prst="roundRect">
+            <a:avLst>
+              <a:gd name="adj" fmla="val 2535"/>
+            </a:avLst>
+          </a:prstGeom>
+          <a:solidFill>
+            <a:srgbClr val="FBEAEC"/>
+          </a:solidFill>
+          <a:ln/>
+          <a:effectLst>
+            <a:outerShdw sx="100000" sy="100000" kx="0" ky="0" algn="bl" rotWithShape="0" blurRad="88900" dist="25400" dir="5400000">
+              <a:srgbClr val="22303C">
+                <a:alpha val="12000"/>
+              </a:srgbClr>
+            </a:outerShdw>
+          </a:effectLst>
+        </p:spPr>
+        <p:txBody>
+          <a:bodyPr/>
+          <a:p/>
+        </p:txBody>
+      </p:sp>
+      <p:sp>
+        <p:nvSpPr>
+          <p:cNvPr id="7" name="Text 5"/>
+          <p:cNvSpPr/>
+          <p:nvPr/>
+        </p:nvSpPr>
+        <p:spPr>
+          <a:xfrm>
+            <a:off x="7439376" y="2578608"/>
+            <a:ext cx="3965936" cy="457200"/>
+          </a:xfrm>
+          <a:prstGeom prst="rect">
+            <a:avLst/>
+          </a:prstGeom>
+          <a:noFill/>
+          <a:ln/>
+        </p:spPr>
+        <p:txBody>
+          <a:bodyPr wrap="square" lIns="0" tIns="0" rIns="0" bIns="0" rtlCol="0" anchor="ctr"/>
+          <a:lstStyle/>
+          <a:p>
+            <a:pPr indent="0" marL="0">
+              <a:buNone/>
+            </a:pPr>
+            <a:r>
+              <a:rPr lang="en-US" sz="1500" b="1" dirty="0">
+                <a:solidFill>
+                  <a:srgbClr val="C62133"/>
+                </a:solidFill>
+                <a:latin typeface="Calibri" pitchFamily="34" charset="0"/>
+                <a:ea typeface="Calibri" pitchFamily="34" charset="-122"/>
+                <a:cs typeface="Calibri" pitchFamily="34" charset="-120"/>
+              </a:rPr>
+              <a:t>ANSWER  </a:t>
+            </a:r>
+            <a:pPr indent="0" marL="0">
+              <a:buNone/>
+            </a:pPr>
+            <a:r>
+              <a:rPr lang="en-US" sz="1500" b="1" dirty="0">
+                <a:solidFill>
+                  <a:srgbClr val="1B2A38"/>
+                </a:solidFill>
+                <a:latin typeface="Calibri" pitchFamily="34" charset="0"/>
+                <a:ea typeface="Calibri" pitchFamily="34" charset="-122"/>
+                <a:cs typeface="Calibri" pitchFamily="34" charset="-120"/>
+              </a:rPr>
+              <a:t>B — Microangiopathic hemolysis</a:t>
+            </a:r>
+            <a:endParaRPr lang="en-US" sz="1500" dirty="0"/>
+          </a:p>
+        </p:txBody>
+      </p:sp>
+      <p:sp>
+        <p:nvSpPr>
+          <p:cNvPr id="8" name="Text 6"/>
+          <p:cNvSpPr/>
+          <p:nvPr/>
+        </p:nvSpPr>
+        <p:spPr>
+          <a:xfrm>
+            <a:off x="7439376" y="3127248"/>
+            <a:ext cx="3947648" cy="2377440"/>
+          </a:xfrm>
+          <a:prstGeom prst="rect">
+            <a:avLst/>
+          </a:prstGeom>
+          <a:noFill/>
+          <a:ln/>
+        </p:spPr>
+        <p:txBody>
+          <a:bodyPr wrap="square" lIns="0" tIns="0" rIns="0" bIns="0" rtlCol="0" anchor="t"/>
+          <a:lstStyle/>
+          <a:p>
+            <a:pPr algn="l" indent="0" marL="0">
+              <a:lnSpc>
+                <a:spcPct val="108000"/>
+              </a:lnSpc>
+              <a:buNone/>
+            </a:pPr>
+            <a:r>
+              <a:rPr lang="en-US" sz="1250" dirty="0">
+                <a:solidFill>
+                  <a:srgbClr val="33444F"/>
+                </a:solidFill>
+                <a:latin typeface="Calibri" pitchFamily="34" charset="0"/>
+                <a:ea typeface="Calibri" pitchFamily="34" charset="-122"/>
+                <a:cs typeface="Calibri" pitchFamily="34" charset="-120"/>
+              </a:rPr>
+              <a:t>Fragmented red cells indicate mechanical/microangiopathic processes requiring urgent assessment.</a:t>
+            </a:r>
+            <a:endParaRPr lang="en-US" sz="1250" dirty="0"/>
+          </a:p>
+        </p:txBody>
+      </p:sp>
+      <p:sp>
+        <p:nvSpPr>
+          <p:cNvPr id="9" name="Text 7"/>
+          <p:cNvSpPr/>
+          <p:nvPr/>
+        </p:nvSpPr>
+        <p:spPr>
+          <a:xfrm>
+            <a:off x="566928" y="6473952"/>
+            <a:ext cx="7772400" cy="274320"/>
+          </a:xfrm>
+          <a:prstGeom prst="rect">
+            <a:avLst/>
+          </a:prstGeom>
+          <a:noFill/>
+          <a:ln/>
+        </p:spPr>
+        <p:txBody>
+          <a:bodyPr wrap="square" lIns="0" tIns="0" rIns="0" bIns="0" rtlCol="0" anchor="ctr"/>
+          <a:lstStyle/>
+          <a:p>
+            <a:pPr algn="l" indent="0" marL="0">
+              <a:buNone/>
+            </a:pPr>
+            <a:r>
+              <a:rPr lang="en-US" sz="850" dirty="0">
+                <a:solidFill>
+                  <a:srgbClr val="9AA8B4"/>
+                </a:solidFill>
+                <a:latin typeface="Calibri" pitchFamily="34" charset="0"/>
+                <a:ea typeface="Calibri" pitchFamily="34" charset="-122"/>
+                <a:cs typeface="Calibri" pitchFamily="34" charset="-120"/>
+              </a:rPr>
+              <a:t>Makassed General Hospital  ·  Department of Laboratory Medicine</a:t>
+            </a:r>
+            <a:endParaRPr lang="en-US" sz="850" dirty="0"/>
+          </a:p>
+        </p:txBody>
+      </p:sp>
+      <p:sp>
+        <p:nvSpPr>
+          <p:cNvPr id="10" name="Text 8"/>
+          <p:cNvSpPr/>
+          <p:nvPr/>
+        </p:nvSpPr>
+        <p:spPr>
+          <a:xfrm>
+            <a:off x="9814255" y="6473952"/>
+            <a:ext cx="1828800" cy="274320"/>
+          </a:xfrm>
+          <a:prstGeom prst="rect">
+            <a:avLst/>
+          </a:prstGeom>
+          <a:noFill/>
+          <a:ln/>
+        </p:spPr>
+        <p:txBody>
+          <a:bodyPr wrap="square" lIns="0" tIns="0" rIns="0" bIns="0" rtlCol="0" anchor="ctr"/>
+          <a:lstStyle/>
+          <a:p>
+            <a:pPr algn="r" indent="0" marL="0">
+              <a:buNone/>
+            </a:pPr>
+            <a:r>
+              <a:rPr lang="en-US" sz="850" dirty="0">
+                <a:solidFill>
+                  <a:srgbClr val="9AA8B4"/>
+                </a:solidFill>
+                <a:latin typeface="Calibri" pitchFamily="34" charset="0"/>
+                <a:ea typeface="Calibri" pitchFamily="34" charset="-122"/>
+                <a:cs typeface="Calibri" pitchFamily="34" charset="-120"/>
+              </a:rPr>
+              <a:t>CP Lecture Series</a:t>
+            </a:r>
+            <a:pPr algn="r" indent="0" marL="0">
+              <a:buNone/>
+            </a:pPr>
+            <a:r>
+              <a:rPr lang="en-US" sz="850" dirty="0">
+                <a:solidFill>
+                  <a:srgbClr val="DCE4EC"/>
+                </a:solidFill>
+                <a:latin typeface="Calibri" pitchFamily="34" charset="0"/>
+                <a:ea typeface="Calibri" pitchFamily="34" charset="-122"/>
+                <a:cs typeface="Calibri" pitchFamily="34" charset="-120"/>
+              </a:rPr>
+              <a:t>   ·   </a:t>
+            </a:r>
+            <a:pPr algn="r" indent="0" marL="0">
+              <a:buNone/>
+            </a:pPr>
+            <a:r>
+              <a:rPr lang="en-US" sz="850" b="1" dirty="0">
+                <a:solidFill>
+                  <a:srgbClr val="C62133"/>
+                </a:solidFill>
+                <a:latin typeface="Calibri" pitchFamily="34" charset="0"/>
+                <a:ea typeface="Calibri" pitchFamily="34" charset="-122"/>
+                <a:cs typeface="Calibri" pitchFamily="34" charset="-120"/>
+              </a:rPr>
+              <a:t>19</a:t>
+            </a:r>
+            <a:endParaRPr lang="en-US" sz="850" dirty="0"/>
+          </a:p>
+        </p:txBody>
+      </p:sp>
+    </p:spTree>
+  </p:cSld>
+  <p:clrMapOvr>
+    <a:masterClrMapping/>
+  </p:clrMapOvr>
+</p:sld>
+</file>
+
+<file path=ppt/slides/slide28.xml><?xml version="1.0" encoding="utf-8"?>
+<p:sld xmlns:a="http://schemas.openxmlformats.org/drawingml/2006/main" xmlns:p="http://schemas.openxmlformats.org/presentationml/2006/main" xmlns:r="http://schemas.openxmlformats.org/officeDocument/2006/relationships">
+  <p:cSld>
+    <p:spTree>
+      <p:nvGrpSpPr>
+        <p:cNvPr id="1" name=""/>
+        <p:cNvGrpSpPr/>
+        <p:nvPr/>
+      </p:nvGrpSpPr>
+      <p:grpSpPr/>
+      <p:sp>
+        <p:nvSpPr>
+          <p:cNvPr id="2" name="Text 0"/>
+          <p:cNvSpPr/>
+          <p:nvPr/>
+        </p:nvSpPr>
+        <p:spPr>
+          <a:xfrm>
+            <a:off x="566928" y="329184"/>
+            <a:ext cx="10515600" cy="310896"/>
+          </a:xfrm>
+          <a:prstGeom prst="rect">
+            <a:avLst/>
+          </a:prstGeom>
+          <a:noFill/>
+          <a:ln/>
+        </p:spPr>
+        <p:txBody>
+          <a:bodyPr wrap="square" lIns="0" tIns="0" rIns="0" bIns="0" rtlCol="0" anchor="ctr"/>
+          <a:lstStyle/>
+          <a:p>
+            <a:pPr algn="l" indent="0" marL="0">
+              <a:buNone/>
+            </a:pPr>
+            <a:r>
+              <a:rPr lang="en-US" sz="1100" b="1" spc="150" kern="0" dirty="0">
+                <a:solidFill>
+                  <a:srgbClr val="C62133"/>
+                </a:solidFill>
+                <a:latin typeface="Calibri" pitchFamily="34" charset="0"/>
+                <a:ea typeface="Calibri" pitchFamily="34" charset="-122"/>
+                <a:cs typeface="Calibri" pitchFamily="34" charset="-120"/>
+              </a:rPr>
+              <a:t>HEMATOLOGY &amp; COAGULATION   ·   BOARD REVIEW  ·  Q2</a:t>
+            </a:r>
+            <a:endParaRPr lang="en-US" sz="1100" dirty="0"/>
+          </a:p>
+        </p:txBody>
+      </p:sp>
+      <p:sp>
+        <p:nvSpPr>
+          <p:cNvPr id="3" name="Text 1"/>
+          <p:cNvSpPr/>
+          <p:nvPr/>
+        </p:nvSpPr>
+        <p:spPr>
+          <a:xfrm>
+            <a:off x="566928" y="713232"/>
+            <a:ext cx="11064240" cy="749808"/>
+          </a:xfrm>
+          <a:prstGeom prst="rect">
+            <a:avLst/>
+          </a:prstGeom>
+          <a:noFill/>
+          <a:ln/>
+        </p:spPr>
+        <p:txBody>
+          <a:bodyPr wrap="square" lIns="0" tIns="0" rIns="0" bIns="0" rtlCol="0" anchor="ctr"/>
+          <a:lstStyle/>
+          <a:p>
+            <a:pPr algn="l" indent="0" marL="0">
+              <a:buNone/>
+            </a:pPr>
+            <a:r>
+              <a:rPr lang="en-US" sz="2600" b="1" dirty="0">
+                <a:solidFill>
+                  <a:srgbClr val="0E3A5F"/>
+                </a:solidFill>
+                <a:latin typeface="Calibri" pitchFamily="34" charset="0"/>
+                <a:ea typeface="Calibri" pitchFamily="34" charset="-122"/>
+                <a:cs typeface="Calibri" pitchFamily="34" charset="-120"/>
+              </a:rPr>
+              <a:t>Board-Style Review</a:t>
+            </a:r>
+            <a:endParaRPr lang="en-US" sz="2600" dirty="0"/>
+          </a:p>
+        </p:txBody>
+      </p:sp>
+      <p:sp>
+        <p:nvSpPr>
+          <p:cNvPr id="4" name="Text 2"/>
+          <p:cNvSpPr/>
+          <p:nvPr/>
+        </p:nvSpPr>
+        <p:spPr>
+          <a:xfrm>
+            <a:off x="566928" y="1417320"/>
+            <a:ext cx="11057839" cy="914400"/>
+          </a:xfrm>
+          <a:prstGeom prst="rect">
+            <a:avLst/>
+          </a:prstGeom>
+          <a:noFill/>
+          <a:ln/>
+        </p:spPr>
+        <p:txBody>
+          <a:bodyPr wrap="square" lIns="0" tIns="0" rIns="0" bIns="0" rtlCol="0" anchor="t"/>
+          <a:lstStyle/>
+          <a:p>
+            <a:pPr algn="l" indent="0" marL="0">
+              <a:lnSpc>
+                <a:spcPct val="105000"/>
+              </a:lnSpc>
+              <a:buNone/>
+            </a:pPr>
+            <a:r>
+              <a:rPr lang="en-US" sz="1450" b="1" dirty="0">
+                <a:solidFill>
+                  <a:srgbClr val="1B2A38"/>
+                </a:solidFill>
+                <a:latin typeface="Calibri" pitchFamily="34" charset="0"/>
+                <a:ea typeface="Calibri" pitchFamily="34" charset="-122"/>
+                <a:cs typeface="Calibri" pitchFamily="34" charset="-120"/>
+              </a:rPr>
+              <a:t>A physiologically impossible MCHC elevation most suggests:</a:t>
+            </a:r>
+            <a:endParaRPr lang="en-US" sz="1450" dirty="0"/>
+          </a:p>
+        </p:txBody>
+      </p:sp>
+      <p:sp>
+        <p:nvSpPr>
+          <p:cNvPr id="5" name="Text 3"/>
+          <p:cNvSpPr/>
+          <p:nvPr/>
+        </p:nvSpPr>
+        <p:spPr>
+          <a:xfrm>
+            <a:off x="658368" y="2395728"/>
+            <a:ext cx="6192390" cy="3017520"/>
+          </a:xfrm>
+          <a:prstGeom prst="rect">
+            <a:avLst/>
+          </a:prstGeom>
+          <a:noFill/>
+          <a:ln/>
+        </p:spPr>
+        <p:txBody>
+          <a:bodyPr wrap="square" lIns="0" tIns="0" rIns="0" bIns="0" rtlCol="0" anchor="t"/>
+          <a:lstStyle/>
+          <a:p>
+            <a:pPr algn="l" indent="0" marL="0">
+              <a:spcAft>
+                <a:spcPts val="600"/>
+              </a:spcAft>
+              <a:buNone/>
+            </a:pPr>
+            <a:r>
+              <a:rPr lang="en-US" sz="1350" dirty="0">
+                <a:solidFill>
+                  <a:srgbClr val="33444F"/>
+                </a:solidFill>
+                <a:latin typeface="Calibri" pitchFamily="34" charset="0"/>
+                <a:ea typeface="Calibri" pitchFamily="34" charset="-122"/>
+                <a:cs typeface="Calibri" pitchFamily="34" charset="-120"/>
+              </a:rPr>
+              <a:t>A. True hyperchromia</a:t>
+            </a:r>
+            <a:endParaRPr lang="en-US" sz="1350" dirty="0"/>
+          </a:p>
+          <a:p>
+            <a:pPr algn="l" indent="0" marL="0">
+              <a:spcAft>
+                <a:spcPts val="600"/>
+              </a:spcAft>
+              <a:buNone/>
+            </a:pPr>
+            <a:r>
+              <a:rPr lang="en-US" sz="1350" b="1" dirty="0">
+                <a:solidFill>
+                  <a:srgbClr val="8E1622"/>
+                </a:solidFill>
+                <a:latin typeface="Calibri" pitchFamily="34" charset="0"/>
+                <a:ea typeface="Calibri" pitchFamily="34" charset="-122"/>
+                <a:cs typeface="Calibri" pitchFamily="34" charset="-120"/>
+              </a:rPr>
+              <a:t>B. An artifact (cold agglutinins, lipemia)</a:t>
+            </a:r>
+            <a:endParaRPr lang="en-US" sz="1350" dirty="0"/>
+          </a:p>
+          <a:p>
+            <a:pPr algn="l" indent="0" marL="0">
+              <a:spcAft>
+                <a:spcPts val="600"/>
+              </a:spcAft>
+              <a:buNone/>
+            </a:pPr>
+            <a:r>
+              <a:rPr lang="en-US" sz="1350" dirty="0">
+                <a:solidFill>
+                  <a:srgbClr val="33444F"/>
+                </a:solidFill>
+                <a:latin typeface="Calibri" pitchFamily="34" charset="0"/>
+                <a:ea typeface="Calibri" pitchFamily="34" charset="-122"/>
+                <a:cs typeface="Calibri" pitchFamily="34" charset="-120"/>
+              </a:rPr>
+              <a:t>C. Iron deficiency</a:t>
+            </a:r>
+            <a:endParaRPr lang="en-US" sz="1350" dirty="0"/>
+          </a:p>
+          <a:p>
+            <a:pPr algn="l" indent="0" marL="0">
+              <a:spcAft>
+                <a:spcPts val="600"/>
+              </a:spcAft>
+              <a:buNone/>
+            </a:pPr>
+            <a:r>
+              <a:rPr lang="en-US" sz="1350" dirty="0">
+                <a:solidFill>
+                  <a:srgbClr val="33444F"/>
+                </a:solidFill>
+                <a:latin typeface="Calibri" pitchFamily="34" charset="0"/>
+                <a:ea typeface="Calibri" pitchFamily="34" charset="-122"/>
+                <a:cs typeface="Calibri" pitchFamily="34" charset="-120"/>
+              </a:rPr>
+              <a:t>D. Thalassemia</a:t>
+            </a:r>
+            <a:endParaRPr lang="en-US" sz="1350" dirty="0"/>
+          </a:p>
+          <a:p>
+            <a:pPr algn="l" indent="0" marL="0">
+              <a:spcAft>
+                <a:spcPts val="600"/>
+              </a:spcAft>
+              <a:buNone/>
+            </a:pPr>
+            <a:r>
+              <a:rPr lang="en-US" sz="1350" dirty="0">
+                <a:solidFill>
+                  <a:srgbClr val="33444F"/>
+                </a:solidFill>
+                <a:latin typeface="Calibri" pitchFamily="34" charset="0"/>
+                <a:ea typeface="Calibri" pitchFamily="34" charset="-122"/>
+                <a:cs typeface="Calibri" pitchFamily="34" charset="-120"/>
+              </a:rPr>
+              <a:t>E. Myelofibrosis</a:t>
+            </a:r>
+            <a:endParaRPr lang="en-US" sz="1350" dirty="0"/>
+          </a:p>
+        </p:txBody>
+      </p:sp>
+      <p:sp>
+        <p:nvSpPr>
+          <p:cNvPr id="6" name="Shape 4"/>
+          <p:cNvSpPr/>
+          <p:nvPr/>
+        </p:nvSpPr>
+        <p:spPr>
+          <a:xfrm>
+            <a:off x="7201632" y="2395728"/>
+            <a:ext cx="4423136" cy="3246120"/>
+          </a:xfrm>
+          <a:prstGeom prst="roundRect">
+            <a:avLst>
+              <a:gd name="adj" fmla="val 2535"/>
+            </a:avLst>
+          </a:prstGeom>
+          <a:solidFill>
+            <a:srgbClr val="FBEAEC"/>
+          </a:solidFill>
+          <a:ln/>
+          <a:effectLst>
+            <a:outerShdw sx="100000" sy="100000" kx="0" ky="0" algn="bl" rotWithShape="0" blurRad="88900" dist="25400" dir="5400000">
+              <a:srgbClr val="22303C">
+                <a:alpha val="12000"/>
+              </a:srgbClr>
+            </a:outerShdw>
+          </a:effectLst>
+        </p:spPr>
+        <p:txBody>
+          <a:bodyPr/>
+          <a:p/>
+        </p:txBody>
+      </p:sp>
+      <p:sp>
+        <p:nvSpPr>
+          <p:cNvPr id="7" name="Text 5"/>
+          <p:cNvSpPr/>
+          <p:nvPr/>
+        </p:nvSpPr>
+        <p:spPr>
+          <a:xfrm>
+            <a:off x="7439376" y="2578608"/>
+            <a:ext cx="3965936" cy="457200"/>
+          </a:xfrm>
+          <a:prstGeom prst="rect">
+            <a:avLst/>
+          </a:prstGeom>
+          <a:noFill/>
+          <a:ln/>
+        </p:spPr>
+        <p:txBody>
+          <a:bodyPr wrap="square" lIns="0" tIns="0" rIns="0" bIns="0" rtlCol="0" anchor="ctr"/>
+          <a:lstStyle/>
+          <a:p>
+            <a:pPr indent="0" marL="0">
+              <a:buNone/>
+            </a:pPr>
+            <a:r>
+              <a:rPr lang="en-US" sz="1500" b="1" dirty="0">
+                <a:solidFill>
+                  <a:srgbClr val="C62133"/>
+                </a:solidFill>
+                <a:latin typeface="Calibri" pitchFamily="34" charset="0"/>
+                <a:ea typeface="Calibri" pitchFamily="34" charset="-122"/>
+                <a:cs typeface="Calibri" pitchFamily="34" charset="-120"/>
+              </a:rPr>
+              <a:t>ANSWER  </a:t>
+            </a:r>
+            <a:pPr indent="0" marL="0">
+              <a:buNone/>
+            </a:pPr>
+            <a:r>
+              <a:rPr lang="en-US" sz="1500" b="1" dirty="0">
+                <a:solidFill>
+                  <a:srgbClr val="1B2A38"/>
+                </a:solidFill>
+                <a:latin typeface="Calibri" pitchFamily="34" charset="0"/>
+                <a:ea typeface="Calibri" pitchFamily="34" charset="-122"/>
+                <a:cs typeface="Calibri" pitchFamily="34" charset="-120"/>
+              </a:rPr>
+              <a:t>B — An artifact</a:t>
+            </a:r>
+            <a:endParaRPr lang="en-US" sz="1500" dirty="0"/>
+          </a:p>
+        </p:txBody>
+      </p:sp>
+      <p:sp>
+        <p:nvSpPr>
+          <p:cNvPr id="8" name="Text 6"/>
+          <p:cNvSpPr/>
+          <p:nvPr/>
+        </p:nvSpPr>
+        <p:spPr>
+          <a:xfrm>
+            <a:off x="7439376" y="3127248"/>
+            <a:ext cx="3947648" cy="2377440"/>
+          </a:xfrm>
+          <a:prstGeom prst="rect">
+            <a:avLst/>
+          </a:prstGeom>
+          <a:noFill/>
+          <a:ln/>
+        </p:spPr>
+        <p:txBody>
+          <a:bodyPr wrap="square" lIns="0" tIns="0" rIns="0" bIns="0" rtlCol="0" anchor="t"/>
+          <a:lstStyle/>
+          <a:p>
+            <a:pPr algn="l" indent="0" marL="0">
+              <a:lnSpc>
+                <a:spcPct val="108000"/>
+              </a:lnSpc>
+              <a:buNone/>
+            </a:pPr>
+            <a:r>
+              <a:rPr lang="en-US" sz="1250" dirty="0">
+                <a:solidFill>
+                  <a:srgbClr val="33444F"/>
+                </a:solidFill>
+                <a:latin typeface="Calibri" pitchFamily="34" charset="0"/>
+                <a:ea typeface="Calibri" pitchFamily="34" charset="-122"/>
+                <a:cs typeface="Calibri" pitchFamily="34" charset="-120"/>
+              </a:rPr>
+              <a:t>Red cells cannot be truly hyperchromic; a very high MCHC indicates an artifact such as cold agglutinins or lipemia.</a:t>
+            </a:r>
+            <a:endParaRPr lang="en-US" sz="1250" dirty="0"/>
+          </a:p>
+        </p:txBody>
+      </p:sp>
+      <p:sp>
+        <p:nvSpPr>
+          <p:cNvPr id="9" name="Text 7"/>
+          <p:cNvSpPr/>
+          <p:nvPr/>
+        </p:nvSpPr>
+        <p:spPr>
+          <a:xfrm>
+            <a:off x="566928" y="6473952"/>
+            <a:ext cx="7772400" cy="274320"/>
+          </a:xfrm>
+          <a:prstGeom prst="rect">
+            <a:avLst/>
+          </a:prstGeom>
+          <a:noFill/>
+          <a:ln/>
+        </p:spPr>
+        <p:txBody>
+          <a:bodyPr wrap="square" lIns="0" tIns="0" rIns="0" bIns="0" rtlCol="0" anchor="ctr"/>
+          <a:lstStyle/>
+          <a:p>
+            <a:pPr algn="l" indent="0" marL="0">
+              <a:buNone/>
+            </a:pPr>
+            <a:r>
+              <a:rPr lang="en-US" sz="850" dirty="0">
+                <a:solidFill>
+                  <a:srgbClr val="9AA8B4"/>
+                </a:solidFill>
+                <a:latin typeface="Calibri" pitchFamily="34" charset="0"/>
+                <a:ea typeface="Calibri" pitchFamily="34" charset="-122"/>
+                <a:cs typeface="Calibri" pitchFamily="34" charset="-120"/>
+              </a:rPr>
+              <a:t>Makassed General Hospital  ·  Department of Laboratory Medicine</a:t>
+            </a:r>
+            <a:endParaRPr lang="en-US" sz="850" dirty="0"/>
+          </a:p>
+        </p:txBody>
+      </p:sp>
+      <p:sp>
+        <p:nvSpPr>
+          <p:cNvPr id="10" name="Text 8"/>
+          <p:cNvSpPr/>
+          <p:nvPr/>
+        </p:nvSpPr>
+        <p:spPr>
+          <a:xfrm>
+            <a:off x="9814255" y="6473952"/>
+            <a:ext cx="1828800" cy="274320"/>
+          </a:xfrm>
+          <a:prstGeom prst="rect">
+            <a:avLst/>
+          </a:prstGeom>
+          <a:noFill/>
+          <a:ln/>
+        </p:spPr>
+        <p:txBody>
+          <a:bodyPr wrap="square" lIns="0" tIns="0" rIns="0" bIns="0" rtlCol="0" anchor="ctr"/>
+          <a:lstStyle/>
+          <a:p>
+            <a:pPr algn="r" indent="0" marL="0">
+              <a:buNone/>
+            </a:pPr>
+            <a:r>
+              <a:rPr lang="en-US" sz="850" dirty="0">
+                <a:solidFill>
+                  <a:srgbClr val="9AA8B4"/>
+                </a:solidFill>
+                <a:latin typeface="Calibri" pitchFamily="34" charset="0"/>
+                <a:ea typeface="Calibri" pitchFamily="34" charset="-122"/>
+                <a:cs typeface="Calibri" pitchFamily="34" charset="-120"/>
+              </a:rPr>
+              <a:t>CP Lecture Series</a:t>
+            </a:r>
+            <a:pPr algn="r" indent="0" marL="0">
+              <a:buNone/>
+            </a:pPr>
+            <a:r>
+              <a:rPr lang="en-US" sz="850" dirty="0">
+                <a:solidFill>
+                  <a:srgbClr val="DCE4EC"/>
+                </a:solidFill>
+                <a:latin typeface="Calibri" pitchFamily="34" charset="0"/>
+                <a:ea typeface="Calibri" pitchFamily="34" charset="-122"/>
+                <a:cs typeface="Calibri" pitchFamily="34" charset="-120"/>
+              </a:rPr>
+              <a:t>   ·   </a:t>
+            </a:r>
+            <a:pPr algn="r" indent="0" marL="0">
+              <a:buNone/>
+            </a:pPr>
+            <a:r>
+              <a:rPr lang="en-US" sz="850" b="1" dirty="0">
+                <a:solidFill>
+                  <a:srgbClr val="C62133"/>
+                </a:solidFill>
+                <a:latin typeface="Calibri" pitchFamily="34" charset="0"/>
+                <a:ea typeface="Calibri" pitchFamily="34" charset="-122"/>
+                <a:cs typeface="Calibri" pitchFamily="34" charset="-120"/>
+              </a:rPr>
+              <a:t>18</a:t>
+            </a:r>
+            <a:endParaRPr lang="en-US" sz="850" dirty="0"/>
+          </a:p>
+        </p:txBody>
+      </p:sp>
+    </p:spTree>
+  </p:cSld>
+  <p:clrMapOvr>
+    <a:masterClrMapping/>
+  </p:clrMapOvr>
+</p:sld>
+</file>
+
+<file path=ppt/slides/slide29.xml><?xml version="1.0" encoding="utf-8"?>
+<p:sld xmlns:a="http://schemas.openxmlformats.org/drawingml/2006/main" xmlns:p="http://schemas.openxmlformats.org/presentationml/2006/main" xmlns:r="http://schemas.openxmlformats.org/officeDocument/2006/relationships">
+  <p:cSld>
+    <p:spTree>
+      <p:nvGrpSpPr>
+        <p:cNvPr id="1" name=""/>
+        <p:cNvGrpSpPr/>
+        <p:nvPr/>
+      </p:nvGrpSpPr>
+      <p:grpSpPr/>
+      <p:sp>
+        <p:nvSpPr>
+          <p:cNvPr id="2" name="Text 0"/>
+          <p:cNvSpPr/>
+          <p:nvPr/>
+        </p:nvSpPr>
+        <p:spPr>
+          <a:xfrm>
+            <a:off x="566928" y="329184"/>
+            <a:ext cx="10515600" cy="310896"/>
+          </a:xfrm>
+          <a:prstGeom prst="rect">
+            <a:avLst/>
+          </a:prstGeom>
+          <a:noFill/>
+          <a:ln/>
+        </p:spPr>
+        <p:txBody>
+          <a:bodyPr wrap="square" lIns="0" tIns="0" rIns="0" bIns="0" rtlCol="0" anchor="ctr"/>
+          <a:lstStyle/>
+          <a:p>
+            <a:pPr algn="l" indent="0" marL="0">
+              <a:buNone/>
+            </a:pPr>
+            <a:r>
+              <a:rPr lang="en-US" sz="1100" b="1" spc="150" kern="0" dirty="0">
+                <a:solidFill>
+                  <a:srgbClr val="C62133"/>
+                </a:solidFill>
+                <a:latin typeface="Calibri" pitchFamily="34" charset="0"/>
+                <a:ea typeface="Calibri" pitchFamily="34" charset="-122"/>
+                <a:cs typeface="Calibri" pitchFamily="34" charset="-120"/>
+              </a:rPr>
+              <a:t>HEMATOLOGY &amp; COAGULATION   ·   BOARD REVIEW  ·  Q1</a:t>
+            </a:r>
+            <a:endParaRPr lang="en-US" sz="1100" dirty="0"/>
+          </a:p>
+        </p:txBody>
+      </p:sp>
+      <p:sp>
+        <p:nvSpPr>
+          <p:cNvPr id="3" name="Text 1"/>
+          <p:cNvSpPr/>
+          <p:nvPr/>
+        </p:nvSpPr>
+        <p:spPr>
+          <a:xfrm>
+            <a:off x="566928" y="713232"/>
+            <a:ext cx="11064240" cy="749808"/>
+          </a:xfrm>
+          <a:prstGeom prst="rect">
+            <a:avLst/>
+          </a:prstGeom>
+          <a:noFill/>
+          <a:ln/>
+        </p:spPr>
+        <p:txBody>
+          <a:bodyPr wrap="square" lIns="0" tIns="0" rIns="0" bIns="0" rtlCol="0" anchor="ctr"/>
+          <a:lstStyle/>
+          <a:p>
+            <a:pPr algn="l" indent="0" marL="0">
+              <a:buNone/>
+            </a:pPr>
+            <a:r>
+              <a:rPr lang="en-US" sz="2600" b="1" dirty="0">
+                <a:solidFill>
+                  <a:srgbClr val="0E3A5F"/>
+                </a:solidFill>
+                <a:latin typeface="Calibri" pitchFamily="34" charset="0"/>
+                <a:ea typeface="Calibri" pitchFamily="34" charset="-122"/>
+                <a:cs typeface="Calibri" pitchFamily="34" charset="-120"/>
+              </a:rPr>
+              <a:t>Board-Style Review</a:t>
+            </a:r>
+            <a:endParaRPr lang="en-US" sz="2600" dirty="0"/>
+          </a:p>
+        </p:txBody>
+      </p:sp>
+      <p:sp>
+        <p:nvSpPr>
+          <p:cNvPr id="4" name="Text 2"/>
+          <p:cNvSpPr/>
+          <p:nvPr/>
+        </p:nvSpPr>
+        <p:spPr>
+          <a:xfrm>
+            <a:off x="566928" y="1417320"/>
+            <a:ext cx="11057839" cy="914400"/>
+          </a:xfrm>
+          <a:prstGeom prst="rect">
+            <a:avLst/>
+          </a:prstGeom>
+          <a:noFill/>
+          <a:ln/>
+        </p:spPr>
+        <p:txBody>
+          <a:bodyPr wrap="square" lIns="0" tIns="0" rIns="0" bIns="0" rtlCol="0" anchor="t"/>
+          <a:lstStyle/>
+          <a:p>
+            <a:pPr algn="l" indent="0" marL="0">
+              <a:lnSpc>
+                <a:spcPct val="105000"/>
+              </a:lnSpc>
+              <a:buNone/>
+            </a:pPr>
+            <a:r>
+              <a:rPr lang="en-US" sz="1450" b="1" dirty="0">
+                <a:solidFill>
+                  <a:srgbClr val="1B2A38"/>
+                </a:solidFill>
+                <a:latin typeface="Calibri" pitchFamily="34" charset="0"/>
+                <a:ea typeface="Calibri" pitchFamily="34" charset="-122"/>
+                <a:cs typeface="Calibri" pitchFamily="34" charset="-120"/>
+              </a:rPr>
+              <a:t>Which finding most strongly favors iron deficiency over thalassemia trait?</a:t>
+            </a:r>
+            <a:endParaRPr lang="en-US" sz="1450" dirty="0"/>
+          </a:p>
+        </p:txBody>
+      </p:sp>
+      <p:sp>
+        <p:nvSpPr>
+          <p:cNvPr id="5" name="Text 3"/>
+          <p:cNvSpPr/>
+          <p:nvPr/>
+        </p:nvSpPr>
+        <p:spPr>
+          <a:xfrm>
+            <a:off x="658368" y="2395728"/>
+            <a:ext cx="6192390" cy="3017520"/>
+          </a:xfrm>
+          <a:prstGeom prst="rect">
+            <a:avLst/>
+          </a:prstGeom>
+          <a:noFill/>
+          <a:ln/>
+        </p:spPr>
+        <p:txBody>
+          <a:bodyPr wrap="square" lIns="0" tIns="0" rIns="0" bIns="0" rtlCol="0" anchor="t"/>
+          <a:lstStyle/>
+          <a:p>
+            <a:pPr algn="l" indent="0" marL="0">
+              <a:spcAft>
+                <a:spcPts val="600"/>
+              </a:spcAft>
+              <a:buNone/>
+            </a:pPr>
+            <a:r>
+              <a:rPr lang="en-US" sz="1350" dirty="0">
+                <a:solidFill>
+                  <a:srgbClr val="33444F"/>
+                </a:solidFill>
+                <a:latin typeface="Calibri" pitchFamily="34" charset="0"/>
+                <a:ea typeface="Calibri" pitchFamily="34" charset="-122"/>
+                <a:cs typeface="Calibri" pitchFamily="34" charset="-120"/>
+              </a:rPr>
+              <a:t>A. Low MCV with normal RDW</a:t>
+            </a:r>
+            <a:endParaRPr lang="en-US" sz="1350" dirty="0"/>
+          </a:p>
+          <a:p>
+            <a:pPr algn="l" indent="0" marL="0">
+              <a:spcAft>
+                <a:spcPts val="600"/>
+              </a:spcAft>
+              <a:buNone/>
+            </a:pPr>
+            <a:r>
+              <a:rPr lang="en-US" sz="1350" b="1" dirty="0">
+                <a:solidFill>
+                  <a:srgbClr val="8E1622"/>
+                </a:solidFill>
+                <a:latin typeface="Calibri" pitchFamily="34" charset="0"/>
+                <a:ea typeface="Calibri" pitchFamily="34" charset="-122"/>
+                <a:cs typeface="Calibri" pitchFamily="34" charset="-120"/>
+              </a:rPr>
+              <a:t>B. Low MCV with high RDW</a:t>
+            </a:r>
+            <a:endParaRPr lang="en-US" sz="1350" dirty="0"/>
+          </a:p>
+          <a:p>
+            <a:pPr algn="l" indent="0" marL="0">
+              <a:spcAft>
+                <a:spcPts val="600"/>
+              </a:spcAft>
+              <a:buNone/>
+            </a:pPr>
+            <a:r>
+              <a:rPr lang="en-US" sz="1350" dirty="0">
+                <a:solidFill>
+                  <a:srgbClr val="33444F"/>
+                </a:solidFill>
+                <a:latin typeface="Calibri" pitchFamily="34" charset="0"/>
+                <a:ea typeface="Calibri" pitchFamily="34" charset="-122"/>
+                <a:cs typeface="Calibri" pitchFamily="34" charset="-120"/>
+              </a:rPr>
+              <a:t>C. Normal MCV</a:t>
+            </a:r>
+            <a:endParaRPr lang="en-US" sz="1350" dirty="0"/>
+          </a:p>
+          <a:p>
+            <a:pPr algn="l" indent="0" marL="0">
+              <a:spcAft>
+                <a:spcPts val="600"/>
+              </a:spcAft>
+              <a:buNone/>
+            </a:pPr>
+            <a:r>
+              <a:rPr lang="en-US" sz="1350" dirty="0">
+                <a:solidFill>
+                  <a:srgbClr val="33444F"/>
+                </a:solidFill>
+                <a:latin typeface="Calibri" pitchFamily="34" charset="0"/>
+                <a:ea typeface="Calibri" pitchFamily="34" charset="-122"/>
+                <a:cs typeface="Calibri" pitchFamily="34" charset="-120"/>
+              </a:rPr>
+              <a:t>D. High MCHC</a:t>
+            </a:r>
+            <a:endParaRPr lang="en-US" sz="1350" dirty="0"/>
+          </a:p>
+          <a:p>
+            <a:pPr algn="l" indent="0" marL="0">
+              <a:spcAft>
+                <a:spcPts val="600"/>
+              </a:spcAft>
+              <a:buNone/>
+            </a:pPr>
+            <a:r>
+              <a:rPr lang="en-US" sz="1350" dirty="0">
+                <a:solidFill>
+                  <a:srgbClr val="33444F"/>
+                </a:solidFill>
+                <a:latin typeface="Calibri" pitchFamily="34" charset="0"/>
+                <a:ea typeface="Calibri" pitchFamily="34" charset="-122"/>
+                <a:cs typeface="Calibri" pitchFamily="34" charset="-120"/>
+              </a:rPr>
+              <a:t>E. Target cells only</a:t>
+            </a:r>
+            <a:endParaRPr lang="en-US" sz="1350" dirty="0"/>
+          </a:p>
+        </p:txBody>
+      </p:sp>
+      <p:sp>
+        <p:nvSpPr>
+          <p:cNvPr id="6" name="Shape 4"/>
+          <p:cNvSpPr/>
+          <p:nvPr/>
+        </p:nvSpPr>
+        <p:spPr>
+          <a:xfrm>
+            <a:off x="7201632" y="2395728"/>
+            <a:ext cx="4423136" cy="3246120"/>
+          </a:xfrm>
+          <a:prstGeom prst="roundRect">
+            <a:avLst>
+              <a:gd name="adj" fmla="val 2535"/>
+            </a:avLst>
+          </a:prstGeom>
+          <a:solidFill>
+            <a:srgbClr val="FBEAEC"/>
+          </a:solidFill>
+          <a:ln/>
+          <a:effectLst>
+            <a:outerShdw sx="100000" sy="100000" kx="0" ky="0" algn="bl" rotWithShape="0" blurRad="88900" dist="25400" dir="5400000">
+              <a:srgbClr val="22303C">
+                <a:alpha val="12000"/>
+              </a:srgbClr>
+            </a:outerShdw>
+          </a:effectLst>
+        </p:spPr>
+        <p:txBody>
+          <a:bodyPr/>
+          <a:p/>
+        </p:txBody>
+      </p:sp>
+      <p:sp>
+        <p:nvSpPr>
+          <p:cNvPr id="7" name="Text 5"/>
+          <p:cNvSpPr/>
+          <p:nvPr/>
+        </p:nvSpPr>
+        <p:spPr>
+          <a:xfrm>
+            <a:off x="7439376" y="2578608"/>
+            <a:ext cx="3965936" cy="457200"/>
+          </a:xfrm>
+          <a:prstGeom prst="rect">
+            <a:avLst/>
+          </a:prstGeom>
+          <a:noFill/>
+          <a:ln/>
+        </p:spPr>
+        <p:txBody>
+          <a:bodyPr wrap="square" lIns="0" tIns="0" rIns="0" bIns="0" rtlCol="0" anchor="ctr"/>
+          <a:lstStyle/>
+          <a:p>
+            <a:pPr indent="0" marL="0">
+              <a:buNone/>
+            </a:pPr>
+            <a:r>
+              <a:rPr lang="en-US" sz="1500" b="1" dirty="0">
+                <a:solidFill>
+                  <a:srgbClr val="C62133"/>
+                </a:solidFill>
+                <a:latin typeface="Calibri" pitchFamily="34" charset="0"/>
+                <a:ea typeface="Calibri" pitchFamily="34" charset="-122"/>
+                <a:cs typeface="Calibri" pitchFamily="34" charset="-120"/>
+              </a:rPr>
+              <a:t>ANSWER  </a:t>
+            </a:r>
+            <a:pPr indent="0" marL="0">
+              <a:buNone/>
+            </a:pPr>
+            <a:r>
+              <a:rPr lang="en-US" sz="1500" b="1" dirty="0">
+                <a:solidFill>
+                  <a:srgbClr val="1B2A38"/>
+                </a:solidFill>
+                <a:latin typeface="Calibri" pitchFamily="34" charset="0"/>
+                <a:ea typeface="Calibri" pitchFamily="34" charset="-122"/>
+                <a:cs typeface="Calibri" pitchFamily="34" charset="-120"/>
+              </a:rPr>
+              <a:t>B — Low MCV with high RDW</a:t>
+            </a:r>
+            <a:endParaRPr lang="en-US" sz="1500" dirty="0"/>
+          </a:p>
+        </p:txBody>
+      </p:sp>
+      <p:sp>
+        <p:nvSpPr>
+          <p:cNvPr id="8" name="Text 6"/>
+          <p:cNvSpPr/>
+          <p:nvPr/>
+        </p:nvSpPr>
+        <p:spPr>
+          <a:xfrm>
+            <a:off x="7439376" y="3127248"/>
+            <a:ext cx="3947648" cy="2377440"/>
+          </a:xfrm>
+          <a:prstGeom prst="rect">
+            <a:avLst/>
+          </a:prstGeom>
+          <a:noFill/>
+          <a:ln/>
+        </p:spPr>
+        <p:txBody>
+          <a:bodyPr wrap="square" lIns="0" tIns="0" rIns="0" bIns="0" rtlCol="0" anchor="t"/>
+          <a:lstStyle/>
+          <a:p>
+            <a:pPr algn="l" indent="0" marL="0">
+              <a:lnSpc>
+                <a:spcPct val="108000"/>
+              </a:lnSpc>
+              <a:buNone/>
+            </a:pPr>
+            <a:r>
+              <a:rPr lang="en-US" sz="1250" dirty="0">
+                <a:solidFill>
+                  <a:srgbClr val="33444F"/>
+                </a:solidFill>
+                <a:latin typeface="Calibri" pitchFamily="34" charset="0"/>
+                <a:ea typeface="Calibri" pitchFamily="34" charset="-122"/>
+                <a:cs typeface="Calibri" pitchFamily="34" charset="-120"/>
+              </a:rPr>
+              <a:t>Iron deficiency typically shows microcytosis with elevated RDW (anisocytosis); thalassemia trait often has a more uniform low MCV with normal RDW.</a:t>
+            </a:r>
+            <a:endParaRPr lang="en-US" sz="1250" dirty="0"/>
+          </a:p>
+        </p:txBody>
+      </p:sp>
+      <p:sp>
+        <p:nvSpPr>
+          <p:cNvPr id="9" name="Text 7"/>
+          <p:cNvSpPr/>
+          <p:nvPr/>
+        </p:nvSpPr>
+        <p:spPr>
+          <a:xfrm>
+            <a:off x="566928" y="6473952"/>
+            <a:ext cx="7772400" cy="274320"/>
+          </a:xfrm>
+          <a:prstGeom prst="rect">
+            <a:avLst/>
+          </a:prstGeom>
+          <a:noFill/>
+          <a:ln/>
+        </p:spPr>
+        <p:txBody>
+          <a:bodyPr wrap="square" lIns="0" tIns="0" rIns="0" bIns="0" rtlCol="0" anchor="ctr"/>
+          <a:lstStyle/>
+          <a:p>
+            <a:pPr algn="l" indent="0" marL="0">
+              <a:buNone/>
+            </a:pPr>
+            <a:r>
+              <a:rPr lang="en-US" sz="850" dirty="0">
+                <a:solidFill>
+                  <a:srgbClr val="9AA8B4"/>
+                </a:solidFill>
+                <a:latin typeface="Calibri" pitchFamily="34" charset="0"/>
+                <a:ea typeface="Calibri" pitchFamily="34" charset="-122"/>
+                <a:cs typeface="Calibri" pitchFamily="34" charset="-120"/>
+              </a:rPr>
+              <a:t>Makassed General Hospital  ·  Department of Laboratory Medicine</a:t>
+            </a:r>
+            <a:endParaRPr lang="en-US" sz="850" dirty="0"/>
+          </a:p>
+        </p:txBody>
+      </p:sp>
+      <p:sp>
+        <p:nvSpPr>
+          <p:cNvPr id="10" name="Text 8"/>
+          <p:cNvSpPr/>
+          <p:nvPr/>
+        </p:nvSpPr>
+        <p:spPr>
+          <a:xfrm>
+            <a:off x="9814255" y="6473952"/>
+            <a:ext cx="1828800" cy="274320"/>
+          </a:xfrm>
+          <a:prstGeom prst="rect">
+            <a:avLst/>
+          </a:prstGeom>
+          <a:noFill/>
+          <a:ln/>
+        </p:spPr>
+        <p:txBody>
+          <a:bodyPr wrap="square" lIns="0" tIns="0" rIns="0" bIns="0" rtlCol="0" anchor="ctr"/>
+          <a:lstStyle/>
+          <a:p>
+            <a:pPr algn="r" indent="0" marL="0">
+              <a:buNone/>
+            </a:pPr>
+            <a:r>
+              <a:rPr lang="en-US" sz="850" dirty="0">
+                <a:solidFill>
+                  <a:srgbClr val="9AA8B4"/>
+                </a:solidFill>
+                <a:latin typeface="Calibri" pitchFamily="34" charset="0"/>
+                <a:ea typeface="Calibri" pitchFamily="34" charset="-122"/>
+                <a:cs typeface="Calibri" pitchFamily="34" charset="-120"/>
+              </a:rPr>
+              <a:t>CP Lecture Series</a:t>
+            </a:r>
+            <a:pPr algn="r" indent="0" marL="0">
+              <a:buNone/>
+            </a:pPr>
+            <a:r>
+              <a:rPr lang="en-US" sz="850" dirty="0">
+                <a:solidFill>
+                  <a:srgbClr val="DCE4EC"/>
+                </a:solidFill>
+                <a:latin typeface="Calibri" pitchFamily="34" charset="0"/>
+                <a:ea typeface="Calibri" pitchFamily="34" charset="-122"/>
+                <a:cs typeface="Calibri" pitchFamily="34" charset="-120"/>
+              </a:rPr>
+              <a:t>   ·   </a:t>
+            </a:r>
+            <a:pPr algn="r" indent="0" marL="0">
+              <a:buNone/>
+            </a:pPr>
+            <a:r>
+              <a:rPr lang="en-US" sz="850" b="1" dirty="0">
+                <a:solidFill>
+                  <a:srgbClr val="C62133"/>
+                </a:solidFill>
+                <a:latin typeface="Calibri" pitchFamily="34" charset="0"/>
+                <a:ea typeface="Calibri" pitchFamily="34" charset="-122"/>
+                <a:cs typeface="Calibri" pitchFamily="34" charset="-120"/>
+              </a:rPr>
+              <a:t>17</a:t>
+            </a:r>
+            <a:endParaRPr lang="en-US" sz="850" dirty="0"/>
+          </a:p>
+        </p:txBody>
+      </p:sp>
+    </p:spTree>
+  </p:cSld>
+  <p:clrMapOvr>
+    <a:masterClrMapping/>
+  </p:clrMapOvr>
+</p:sld>
+</file>
+
 <file path=ppt/slides/slide3.xml><?xml version="1.0" encoding="utf-8"?>
 <p:sld xmlns:a="http://schemas.openxmlformats.org/drawingml/2006/main" xmlns:r="http://schemas.openxmlformats.org/officeDocument/2006/relationships" xmlns:p="http://schemas.openxmlformats.org/presentationml/2006/main">
   <p:cSld name="Slide 3">
@@ -12238,6 +13850,10 @@
             </a:outerShdw>
           </a:effectLst>
         </p:spPr>
+        <p:txBody>
+          <a:bodyPr/>
+          <a:p/>
+        </p:txBody>
       </p:sp>
       <p:sp>
         <p:nvSpPr>
@@ -12265,6 +13881,10 @@
             </a:outerShdw>
           </a:effectLst>
         </p:spPr>
+        <p:txBody>
+          <a:bodyPr/>
+          <a:p/>
+        </p:txBody>
       </p:sp>
       <p:sp>
         <p:nvSpPr>
@@ -12372,6 +13992,10 @@
             </a:outerShdw>
           </a:effectLst>
         </p:spPr>
+        <p:txBody>
+          <a:bodyPr/>
+          <a:p/>
+        </p:txBody>
       </p:sp>
       <p:sp>
         <p:nvSpPr>
@@ -12399,6 +14023,10 @@
             </a:outerShdw>
           </a:effectLst>
         </p:spPr>
+        <p:txBody>
+          <a:bodyPr/>
+          <a:p/>
+        </p:txBody>
       </p:sp>
       <p:sp>
         <p:nvSpPr>
@@ -12506,6 +14134,10 @@
             </a:outerShdw>
           </a:effectLst>
         </p:spPr>
+        <p:txBody>
+          <a:bodyPr/>
+          <a:p/>
+        </p:txBody>
       </p:sp>
       <p:sp>
         <p:nvSpPr>
@@ -12533,6 +14165,10 @@
             </a:outerShdw>
           </a:effectLst>
         </p:spPr>
+        <p:txBody>
+          <a:bodyPr/>
+          <a:p/>
+        </p:txBody>
       </p:sp>
       <p:sp>
         <p:nvSpPr>
@@ -12640,6 +14276,10 @@
             </a:outerShdw>
           </a:effectLst>
         </p:spPr>
+        <p:txBody>
+          <a:bodyPr/>
+          <a:p/>
+        </p:txBody>
       </p:sp>
       <p:sp>
         <p:nvSpPr>
@@ -12667,6 +14307,10 @@
             </a:outerShdw>
           </a:effectLst>
         </p:spPr>
+        <p:txBody>
+          <a:bodyPr/>
+          <a:p/>
+        </p:txBody>
       </p:sp>
       <p:sp>
         <p:nvSpPr>
@@ -12774,6 +14418,10 @@
             </a:outerShdw>
           </a:effectLst>
         </p:spPr>
+        <p:txBody>
+          <a:bodyPr/>
+          <a:p/>
+        </p:txBody>
       </p:sp>
       <p:sp>
         <p:nvSpPr>
@@ -12801,6 +14449,10 @@
             </a:outerShdw>
           </a:effectLst>
         </p:spPr>
+        <p:txBody>
+          <a:bodyPr/>
+          <a:p/>
+        </p:txBody>
       </p:sp>
       <p:sp>
         <p:nvSpPr>
@@ -12908,6 +14560,10 @@
             </a:outerShdw>
           </a:effectLst>
         </p:spPr>
+        <p:txBody>
+          <a:bodyPr/>
+          <a:p/>
+        </p:txBody>
       </p:sp>
       <p:sp>
         <p:nvSpPr>
@@ -12935,6 +14591,10 @@
             </a:outerShdw>
           </a:effectLst>
         </p:spPr>
+        <p:txBody>
+          <a:bodyPr/>
+          <a:p/>
+        </p:txBody>
       </p:sp>
       <p:sp>
         <p:nvSpPr>
@@ -13258,6 +14918,10 @@
             </a:outerShdw>
           </a:effectLst>
         </p:spPr>
+        <p:txBody>
+          <a:bodyPr/>
+          <a:p/>
+        </p:txBody>
       </p:sp>
       <p:sp>
         <p:nvSpPr>
@@ -13285,6 +14949,10 @@
             </a:outerShdw>
           </a:effectLst>
         </p:spPr>
+        <p:txBody>
+          <a:bodyPr/>
+          <a:p/>
+        </p:txBody>
       </p:sp>
       <p:sp>
         <p:nvSpPr>
@@ -13399,6 +15067,10 @@
           </a:solidFill>
           <a:ln/>
         </p:spPr>
+        <p:txBody>
+          <a:bodyPr/>
+          <a:p/>
+        </p:txBody>
       </p:sp>
       <p:sp>
         <p:nvSpPr>
@@ -13426,6 +15098,10 @@
             </a:outerShdw>
           </a:effectLst>
         </p:spPr>
+        <p:txBody>
+          <a:bodyPr/>
+          <a:p/>
+        </p:txBody>
       </p:sp>
       <p:sp>
         <p:nvSpPr>
@@ -13547,6 +15223,10 @@
             </a:outerShdw>
           </a:effectLst>
         </p:spPr>
+        <p:txBody>
+          <a:bodyPr/>
+          <a:p/>
+        </p:txBody>
       </p:sp>
       <p:sp>
         <p:nvSpPr>
@@ -13574,6 +15254,10 @@
             </a:outerShdw>
           </a:effectLst>
         </p:spPr>
+        <p:txBody>
+          <a:bodyPr/>
+          <a:p/>
+        </p:txBody>
       </p:sp>
       <p:sp>
         <p:nvSpPr>
@@ -13688,6 +15372,10 @@
           </a:solidFill>
           <a:ln/>
         </p:spPr>
+        <p:txBody>
+          <a:bodyPr/>
+          <a:p/>
+        </p:txBody>
       </p:sp>
       <p:sp>
         <p:nvSpPr>
@@ -13715,6 +15403,10 @@
             </a:outerShdw>
           </a:effectLst>
         </p:spPr>
+        <p:txBody>
+          <a:bodyPr/>
+          <a:p/>
+        </p:txBody>
       </p:sp>
       <p:sp>
         <p:nvSpPr>
@@ -13836,6 +15528,10 @@
             </a:outerShdw>
           </a:effectLst>
         </p:spPr>
+        <p:txBody>
+          <a:bodyPr/>
+          <a:p/>
+        </p:txBody>
       </p:sp>
       <p:sp>
         <p:nvSpPr>
@@ -13863,6 +15559,10 @@
             </a:outerShdw>
           </a:effectLst>
         </p:spPr>
+        <p:txBody>
+          <a:bodyPr/>
+          <a:p/>
+        </p:txBody>
       </p:sp>
       <p:sp>
         <p:nvSpPr>
@@ -14101,6 +15801,10 @@
           </a:solidFill>
           <a:ln/>
         </p:spPr>
+        <p:txBody>
+          <a:bodyPr/>
+          <a:p/>
+        </p:txBody>
       </p:sp>
       <p:sp>
         <p:nvSpPr>
@@ -14123,6 +15827,10 @@
           </a:solidFill>
           <a:ln/>
         </p:spPr>
+        <p:txBody>
+          <a:bodyPr/>
+          <a:p/>
+        </p:txBody>
       </p:sp>
       <p:sp>
         <p:nvSpPr>
@@ -14384,6 +16092,10 @@
             </a:outerShdw>
           </a:effectLst>
         </p:spPr>
+        <p:txBody>
+          <a:bodyPr/>
+          <a:p/>
+        </p:txBody>
       </p:sp>
       <p:pic>
         <p:nvPicPr>
@@ -14692,6 +16404,10 @@
             </a:outerShdw>
           </a:effectLst>
         </p:spPr>
+        <p:txBody>
+          <a:bodyPr/>
+          <a:p/>
+        </p:txBody>
       </p:sp>
       <p:sp>
         <p:nvSpPr>
@@ -14866,6 +16582,10 @@
             </a:outerShdw>
           </a:effectLst>
         </p:spPr>
+        <p:txBody>
+          <a:bodyPr/>
+          <a:p/>
+        </p:txBody>
       </p:sp>
       <p:sp>
         <p:nvSpPr>
@@ -15256,6 +16976,10 @@
             </a:outerShdw>
           </a:effectLst>
         </p:spPr>
+        <p:txBody>
+          <a:bodyPr/>
+          <a:p/>
+        </p:txBody>
       </p:sp>
       <p:sp>
         <p:nvSpPr>
@@ -15430,6 +17154,10 @@
             </a:outerShdw>
           </a:effectLst>
         </p:spPr>
+        <p:txBody>
+          <a:bodyPr/>
+          <a:p/>
+        </p:txBody>
       </p:sp>
       <p:sp>
         <p:nvSpPr>
@@ -15735,6 +17463,10 @@
           </a:solidFill>
           <a:ln/>
         </p:spPr>
+        <p:txBody>
+          <a:bodyPr/>
+          <a:p/>
+        </p:txBody>
       </p:sp>
       <p:sp>
         <p:nvSpPr>
@@ -15757,6 +17489,10 @@
           </a:solidFill>
           <a:ln/>
         </p:spPr>
+        <p:txBody>
+          <a:bodyPr/>
+          <a:p/>
+        </p:txBody>
       </p:sp>
       <p:sp>
         <p:nvSpPr>
